--- a/lectures/L3.pptx
+++ b/lectures/L3.pptx
@@ -9,10 +9,10 @@
     <p:sldMasterId id="2147483712" r:id="rId8"/>
   </p:sldMasterIdLst>
   <p:notesMasterIdLst>
-    <p:notesMasterId r:id="rId56"/>
+    <p:notesMasterId r:id="rId60"/>
   </p:notesMasterIdLst>
   <p:handoutMasterIdLst>
-    <p:handoutMasterId r:id="rId57"/>
+    <p:handoutMasterId r:id="rId61"/>
   </p:handoutMasterIdLst>
   <p:sldIdLst>
     <p:sldId id="280" r:id="rId9"/>
@@ -42,26 +42,30 @@
     <p:sldId id="304" r:id="rId33"/>
     <p:sldId id="305" r:id="rId34"/>
     <p:sldId id="306" r:id="rId35"/>
-    <p:sldId id="307" r:id="rId36"/>
-    <p:sldId id="308" r:id="rId37"/>
-    <p:sldId id="309" r:id="rId38"/>
-    <p:sldId id="310" r:id="rId39"/>
-    <p:sldId id="311" r:id="rId40"/>
-    <p:sldId id="312" r:id="rId41"/>
-    <p:sldId id="313" r:id="rId42"/>
-    <p:sldId id="314" r:id="rId43"/>
-    <p:sldId id="315" r:id="rId44"/>
-    <p:sldId id="316" r:id="rId45"/>
-    <p:sldId id="327" r:id="rId46"/>
-    <p:sldId id="319" r:id="rId47"/>
-    <p:sldId id="320" r:id="rId48"/>
-    <p:sldId id="321" r:id="rId49"/>
-    <p:sldId id="322" r:id="rId50"/>
-    <p:sldId id="323" r:id="rId51"/>
-    <p:sldId id="324" r:id="rId52"/>
-    <p:sldId id="325" r:id="rId53"/>
-    <p:sldId id="326" r:id="rId54"/>
-    <p:sldId id="328" r:id="rId55"/>
+    <p:sldId id="329" r:id="rId36"/>
+    <p:sldId id="330" r:id="rId37"/>
+    <p:sldId id="307" r:id="rId38"/>
+    <p:sldId id="308" r:id="rId39"/>
+    <p:sldId id="309" r:id="rId40"/>
+    <p:sldId id="310" r:id="rId41"/>
+    <p:sldId id="311" r:id="rId42"/>
+    <p:sldId id="312" r:id="rId43"/>
+    <p:sldId id="331" r:id="rId44"/>
+    <p:sldId id="313" r:id="rId45"/>
+    <p:sldId id="332" r:id="rId46"/>
+    <p:sldId id="314" r:id="rId47"/>
+    <p:sldId id="315" r:id="rId48"/>
+    <p:sldId id="316" r:id="rId49"/>
+    <p:sldId id="327" r:id="rId50"/>
+    <p:sldId id="319" r:id="rId51"/>
+    <p:sldId id="320" r:id="rId52"/>
+    <p:sldId id="321" r:id="rId53"/>
+    <p:sldId id="322" r:id="rId54"/>
+    <p:sldId id="323" r:id="rId55"/>
+    <p:sldId id="324" r:id="rId56"/>
+    <p:sldId id="325" r:id="rId57"/>
+    <p:sldId id="326" r:id="rId58"/>
+    <p:sldId id="328" r:id="rId59"/>
   </p:sldIdLst>
   <p:sldSz cx="9144000" cy="5715000" type="screen16x10"/>
   <p:notesSz cx="6858000" cy="9144000"/>
@@ -2907,7 +2911,7 @@
           <a:p>
             <a:fld id="{2A8A781A-1859-4C85-BF75-12C8100C455E}" type="datetimeFigureOut">
               <a:rPr lang="nb-NO" smtClean="0"/>
-              <a:t>13.09.2021</a:t>
+              <a:t>31.07.2026</a:t>
             </a:fld>
             <a:endParaRPr lang="nb-NO" dirty="0"/>
           </a:p>
@@ -3084,7 +3088,7 @@
           <a:p>
             <a:fld id="{8B442447-825E-F44A-AE66-BBD0FC2F1FF6}" type="datetimeFigureOut">
               <a:rPr lang="nb-NO" smtClean="0"/>
-              <a:t>13.09.2021</a:t>
+              <a:t>31.07.2026</a:t>
             </a:fld>
             <a:endParaRPr lang="nb-NO" dirty="0"/>
           </a:p>
@@ -14955,7 +14959,7 @@
             <a:pPr lvl="1"/>
             <a:r>
               <a:rPr lang="it-IT" sz="2400" dirty="0"/>
-              <a:t>Describes the relatinship between the price a good is offered at and the corresponding quantity demanded.</a:t>
+              <a:t>Describes the relationship between the price a good is offered at and the corresponding quantity demanded.</a:t>
             </a:r>
           </a:p>
           <a:p>
@@ -16709,7 +16713,7 @@
             <a:pPr algn="ctr"/>
             <a:r>
               <a:rPr lang="en-US" dirty="0"/>
-              <a:t>Inelastic Demand </a:t>
+              <a:t>Linear Demand: Elasticity Is Not Constant</a:t>
             </a:r>
           </a:p>
         </p:txBody>
@@ -16730,55 +16734,103 @@
             <p:ph idx="1"/>
           </p:nvPr>
         </p:nvSpPr>
-        <p:spPr/>
+        <p:spPr>
+          <a:xfrm>
+            <a:off x="628650" y="1425383"/>
+            <a:ext cx="3657600" cy="3330732"/>
+          </a:xfrm>
+        </p:spPr>
         <p:txBody>
           <a:bodyPr/>
           <a:lstStyle/>
           <a:p>
             <a:r>
-              <a:rPr lang="en-US" altLang="en-US" sz="2400" i="1" dirty="0"/>
+              <a:rPr lang="en-US" altLang="en-US" sz="1800" dirty="0"/>
+              <a:t>For linear demand, P = a − bQ, the slope dQ/dP is constant</a:t>
+            </a:r>
+          </a:p>
+          <a:p>
+            <a:r>
+              <a:rPr lang="en-US" altLang="en-US" sz="1800" dirty="0"/>
+              <a:t>But elasticity depends on the ratio P/Q, which changes at every point on the line</a:t>
+            </a:r>
+          </a:p>
+          <a:p>
+            <a:pPr lvl="1"/>
+            <a:r>
+              <a:rPr lang="en-US" altLang="en-US" sz="1600" dirty="0"/>
+              <a:t>High price, low quantity (top of curve): demand is more elastic</a:t>
+            </a:r>
+          </a:p>
+          <a:p>
+            <a:pPr lvl="1"/>
+            <a:r>
+              <a:rPr lang="en-US" altLang="en-US" sz="1600" dirty="0"/>
+              <a:t>Low price, high quantity (bottom of curve): demand is more inelastic</a:t>
+            </a:r>
+          </a:p>
+          <a:p>
+            <a:r>
+              <a:rPr lang="en-US" altLang="en-US" sz="1800" dirty="0"/>
+              <a:t>Example: Q = 50 − P → </a:t>
+            </a:r>
+            <a:r>
+              <a:rPr lang="en-US" altLang="en-US" sz="1800" i="1" dirty="0"/>
               <a:t>E</a:t>
             </a:r>
             <a:r>
-              <a:rPr lang="en-US" altLang="en-US" sz="2400" i="1" baseline="-25000" dirty="0"/>
+              <a:rPr lang="en-US" altLang="en-US" sz="1800" i="1" baseline="-25000" dirty="0"/>
               <a:t>p</a:t>
             </a:r>
             <a:r>
-              <a:rPr lang="en-US" altLang="en-US" sz="2400" dirty="0"/>
-              <a:t> is less than 1 in absolute value</a:t>
-            </a:r>
-          </a:p>
-          <a:p>
-            <a:r>
-              <a:rPr lang="en-US" altLang="en-US" sz="2400" dirty="0"/>
-              <a:t>Quantity demanded is relatively unresponsive to a change in price</a:t>
-            </a:r>
-          </a:p>
-          <a:p>
-            <a:r>
-              <a:rPr lang="en-US" altLang="en-US" sz="2400" dirty="0"/>
-              <a:t>|%</a:t>
-            </a:r>
-            <a:r>
-              <a:rPr lang="en-US" altLang="en-US" sz="2400" dirty="0">
-                <a:sym typeface="Symbol" panose="05050102010706020507" pitchFamily="18" charset="2"/>
-              </a:rPr>
-              <a:t>Q| &lt; |%P|</a:t>
-            </a:r>
-          </a:p>
-          <a:p>
-            <a:r>
-              <a:rPr lang="en-US" altLang="en-US" sz="2400" dirty="0">
-                <a:sym typeface="Symbol" panose="05050102010706020507" pitchFamily="18" charset="2"/>
-              </a:rPr>
-              <a:t>Total expenditure (P*Q) increases when price increases</a:t>
-            </a:r>
-          </a:p>
-          <a:p>
+              <a:rPr lang="en-US" altLang="en-US" sz="1800" dirty="0"/>
+              <a:t> = −4.0 at P = 40, but </a:t>
+            </a:r>
+            <a:r>
+              <a:rPr lang="en-US" altLang="en-US" sz="1800" i="1" dirty="0"/>
+              <a:t>E</a:t>
+            </a:r>
+            <a:r>
+              <a:rPr lang="en-US" altLang="en-US" sz="1800" i="1" baseline="-25000" dirty="0"/>
+              <a:t>p</a:t>
+            </a:r>
+            <a:r>
+              <a:rPr lang="en-US" altLang="en-US" sz="1800" dirty="0"/>
+              <a:t> = −0.25 at P = 10</a:t>
+            </a:r>
+          </a:p>
+          <a:p>
+            <a:pPr marL="0" indent="0">
+              <a:buNone/>
+            </a:pPr>
             <a:endParaRPr lang="en-GB" dirty="0"/>
           </a:p>
         </p:txBody>
       </p:sp>
+      <p:pic>
+        <p:nvPicPr>
+          <p:cNvPr id="9" name="Chart"/>
+          <p:cNvPicPr>
+            <a:picLocks noChangeAspect="1"/>
+          </p:cNvPicPr>
+          <p:nvPr/>
+        </p:nvPicPr>
+        <p:blipFill>
+          <a:blip r:embed="rId2"/>
+          <a:stretch>
+            <a:fillRect/>
+          </a:stretch>
+        </p:blipFill>
+        <p:spPr>
+          <a:xfrm>
+            <a:off x="4423410" y="1425383"/>
+            <a:ext cx="3608292" cy="3330732"/>
+          </a:xfrm>
+          <a:prstGeom prst="rect">
+            <a:avLst/>
+          </a:prstGeom>
+        </p:spPr>
+      </p:pic>
     </p:spTree>
     <p:extLst>
       <p:ext uri="{BB962C8B-B14F-4D97-AF65-F5344CB8AC3E}">
@@ -16814,7 +16866,7 @@
           <p:cNvPr id="2" name="Title 1">
             <a:extLst>
               <a:ext uri="{FF2B5EF4-FFF2-40B4-BE49-F238E27FC236}">
-                <a16:creationId xmlns:a16="http://schemas.microsoft.com/office/drawing/2014/main" id="{3B9B0B4A-53E4-4777-9439-06044F94E068}"/>
+                <a16:creationId xmlns:a16="http://schemas.microsoft.com/office/drawing/2014/main" id="{856078A9-2D4D-4AF3-BAF2-8F471D291691}"/>
               </a:ext>
             </a:extLst>
           </p:cNvPr>
@@ -16832,10 +16884,9 @@
           <a:p>
             <a:pPr algn="ctr"/>
             <a:r>
-              <a:rPr lang="en-US" altLang="en-US" dirty="0"/>
-              <a:t>Unit Elastic Demand</a:t>
-            </a:r>
-            <a:endParaRPr lang="en-GB" dirty="0"/>
+              <a:rPr lang="en-US" dirty="0"/>
+              <a:t>Constant Elasticity (Isoelastic) Demand</a:t>
+            </a:r>
           </a:p>
         </p:txBody>
       </p:sp>
@@ -16844,7 +16895,7 @@
           <p:cNvPr id="3" name="Content Placeholder 2">
             <a:extLst>
               <a:ext uri="{FF2B5EF4-FFF2-40B4-BE49-F238E27FC236}">
-                <a16:creationId xmlns:a16="http://schemas.microsoft.com/office/drawing/2014/main" id="{98A7AFB0-180E-47E7-97A3-85D1C2566731}"/>
+                <a16:creationId xmlns:a16="http://schemas.microsoft.com/office/drawing/2014/main" id="{C0F02B67-FD8B-49FF-A9F7-09D9BA84E66A}"/>
               </a:ext>
             </a:extLst>
           </p:cNvPr>
@@ -16855,60 +16906,103 @@
             <p:ph idx="1"/>
           </p:nvPr>
         </p:nvSpPr>
-        <p:spPr/>
+        <p:spPr>
+          <a:xfrm>
+            <a:off x="628650" y="1425383"/>
+            <a:ext cx="3657600" cy="3330732"/>
+          </a:xfrm>
+        </p:spPr>
         <p:txBody>
           <a:bodyPr/>
           <a:lstStyle/>
           <a:p>
             <a:r>
-              <a:rPr lang="en-US" altLang="en-US" sz="2400" dirty="0"/>
+              <a:rPr lang="en-US" altLang="en-US" sz="1800" dirty="0"/>
+              <a:t>Constant elasticity requires Q = A × P</a:t>
+            </a:r>
+            <a:r>
+              <a:rPr lang="en-US" altLang="en-US" sz="1800" baseline="30000" dirty="0"/>
+              <a:t>−Ep</a:t>
+            </a:r>
+            <a:r>
+              <a:rPr lang="en-US" altLang="en-US" sz="1800" dirty="0"/>
+              <a:t> — a power function, not a straight line</a:t>
+            </a:r>
+          </a:p>
+          <a:p>
+            <a:r>
+              <a:rPr lang="en-US" altLang="en-US" sz="1800" dirty="0"/>
+              <a:t>This curve is convex to the origin: it bows inward and never touches either axis</a:t>
+            </a:r>
+          </a:p>
+          <a:p>
+            <a:pPr lvl="1"/>
+            <a:r>
+              <a:rPr lang="en-US" altLang="en-US" sz="1600" dirty="0"/>
+              <a:t>Example: unit-elastic demand, Q = 100/P (</a:t>
+            </a:r>
+            <a:r>
+              <a:rPr lang="en-US" altLang="en-US" sz="1600" i="1" dirty="0"/>
               <a:t>E</a:t>
             </a:r>
             <a:r>
-              <a:rPr lang="en-US" altLang="en-US" sz="2400" baseline="-25000" dirty="0"/>
+              <a:rPr lang="en-US" altLang="en-US" sz="1600" i="1" baseline="-25000" dirty="0"/>
               <a:t>p</a:t>
             </a:r>
             <a:r>
-              <a:rPr lang="en-US" altLang="en-US" sz="2400" dirty="0"/>
-              <a:t> is 1 in absolute value</a:t>
-            </a:r>
-          </a:p>
-          <a:p>
-            <a:r>
-              <a:rPr lang="en-US" altLang="en-US" sz="2400" dirty="0"/>
-              <a:t>Quantity demanded is neither relatively responsive nor unresponsive to a change in price</a:t>
-            </a:r>
-          </a:p>
-          <a:p>
-            <a:r>
-              <a:rPr lang="en-US" altLang="en-US" sz="2400" dirty="0"/>
-              <a:t>|%</a:t>
-            </a:r>
-            <a:r>
-              <a:rPr lang="en-US" altLang="en-US" sz="2400" dirty="0">
-                <a:sym typeface="Symbol" panose="05050102010706020507" pitchFamily="18" charset="2"/>
-              </a:rPr>
-              <a:t>Q| = |%P|</a:t>
-            </a:r>
-          </a:p>
-          <a:p>
-            <a:r>
-              <a:rPr lang="en-US" altLang="en-US" sz="2400" dirty="0">
-                <a:sym typeface="Symbol" panose="05050102010706020507" pitchFamily="18" charset="2"/>
-              </a:rPr>
-              <a:t>Total expenditure (P*Q) is unaffected by a price change</a:t>
-            </a:r>
-            <a:endParaRPr lang="en-US" altLang="en-US" sz="2400" dirty="0"/>
-          </a:p>
-          <a:p>
+              <a:rPr lang="en-US" altLang="en-US" sz="1600" dirty="0"/>
+              <a:t> = −1 everywhere)</a:t>
+            </a:r>
+          </a:p>
+          <a:p>
+            <a:pPr lvl="1"/>
+            <a:r>
+              <a:rPr lang="en-US" altLang="en-US" sz="1600" dirty="0"/>
+              <a:t>P = 10 → Q = 10;  P = 20 → Q = 5;  P = 40 → Q = 2.5 — elasticity stays exactly −1 at every price</a:t>
+            </a:r>
+          </a:p>
+          <a:p>
+            <a:r>
+              <a:rPr lang="en-US" altLang="en-US" sz="1800" dirty="0"/>
+              <a:t>Total revenue (P × Q) stays constant along the entire curve</a:t>
+            </a:r>
+          </a:p>
+          <a:p>
+            <a:pPr marL="0" indent="0">
+              <a:buNone/>
+            </a:pPr>
             <a:endParaRPr lang="en-GB" dirty="0"/>
           </a:p>
         </p:txBody>
       </p:sp>
+      <p:pic>
+        <p:nvPicPr>
+          <p:cNvPr id="9" name="Chart"/>
+          <p:cNvPicPr>
+            <a:picLocks noChangeAspect="1"/>
+          </p:cNvPicPr>
+          <p:nvPr/>
+        </p:nvPicPr>
+        <p:blipFill>
+          <a:blip r:embed="rId2"/>
+          <a:stretch>
+            <a:fillRect/>
+          </a:stretch>
+        </p:blipFill>
+        <p:spPr>
+          <a:xfrm>
+            <a:off x="4423410" y="1425383"/>
+            <a:ext cx="3608292" cy="3330732"/>
+          </a:xfrm>
+          <a:prstGeom prst="rect">
+            <a:avLst/>
+          </a:prstGeom>
+        </p:spPr>
+      </p:pic>
     </p:spTree>
     <p:extLst>
       <p:ext uri="{BB962C8B-B14F-4D97-AF65-F5344CB8AC3E}">
-        <p14:creationId xmlns:p14="http://schemas.microsoft.com/office/powerpoint/2010/main" val="4277551326"/>
+        <p14:creationId xmlns:p14="http://schemas.microsoft.com/office/powerpoint/2010/main" val="89637130"/>
       </p:ext>
     </p:extLst>
   </p:cSld>
@@ -17039,6 +17133,269 @@
           <p:cNvPr id="2" name="Title 1">
             <a:extLst>
               <a:ext uri="{FF2B5EF4-FFF2-40B4-BE49-F238E27FC236}">
+                <a16:creationId xmlns:a16="http://schemas.microsoft.com/office/drawing/2014/main" id="{856078A9-2D4D-4AF3-BAF2-8F471D291691}"/>
+              </a:ext>
+            </a:extLst>
+          </p:cNvPr>
+          <p:cNvSpPr>
+            <a:spLocks noGrp="1"/>
+          </p:cNvSpPr>
+          <p:nvPr>
+            <p:ph type="title"/>
+          </p:nvPr>
+        </p:nvSpPr>
+        <p:spPr/>
+        <p:txBody>
+          <a:bodyPr/>
+          <a:lstStyle/>
+          <a:p>
+            <a:pPr algn="ctr"/>
+            <a:r>
+              <a:rPr lang="en-US" dirty="0"/>
+              <a:t>Inelastic Demand </a:t>
+            </a:r>
+          </a:p>
+        </p:txBody>
+      </p:sp>
+      <p:sp>
+        <p:nvSpPr>
+          <p:cNvPr id="3" name="Content Placeholder 2">
+            <a:extLst>
+              <a:ext uri="{FF2B5EF4-FFF2-40B4-BE49-F238E27FC236}">
+                <a16:creationId xmlns:a16="http://schemas.microsoft.com/office/drawing/2014/main" id="{C0F02B67-FD8B-49FF-A9F7-09D9BA84E66A}"/>
+              </a:ext>
+            </a:extLst>
+          </p:cNvPr>
+          <p:cNvSpPr>
+            <a:spLocks noGrp="1"/>
+          </p:cNvSpPr>
+          <p:nvPr>
+            <p:ph idx="1"/>
+          </p:nvPr>
+        </p:nvSpPr>
+        <p:spPr/>
+        <p:txBody>
+          <a:bodyPr/>
+          <a:lstStyle/>
+          <a:p>
+            <a:r>
+              <a:rPr lang="en-US" altLang="en-US" sz="2400" i="1" dirty="0"/>
+              <a:t>E</a:t>
+            </a:r>
+            <a:r>
+              <a:rPr lang="en-US" altLang="en-US" sz="2400" i="1" baseline="-25000" dirty="0"/>
+              <a:t>p</a:t>
+            </a:r>
+            <a:r>
+              <a:rPr lang="en-US" altLang="en-US" sz="2400" dirty="0"/>
+              <a:t> is less than 1 in absolute value</a:t>
+            </a:r>
+          </a:p>
+          <a:p>
+            <a:r>
+              <a:rPr lang="en-US" altLang="en-US" sz="2400" dirty="0"/>
+              <a:t>Quantity demanded is relatively unresponsive to a change in price</a:t>
+            </a:r>
+          </a:p>
+          <a:p>
+            <a:r>
+              <a:rPr lang="en-US" altLang="en-US" sz="2400" dirty="0"/>
+              <a:t>|%</a:t>
+            </a:r>
+            <a:r>
+              <a:rPr lang="en-US" altLang="en-US" sz="2400" dirty="0">
+                <a:sym typeface="Symbol" panose="05050102010706020507" pitchFamily="18" charset="2"/>
+              </a:rPr>
+              <a:t>Q| &lt; |%P|</a:t>
+            </a:r>
+          </a:p>
+          <a:p>
+            <a:pPr lvl="1"/>
+            <a:r>
+              <a:rPr lang="en-US" altLang="en-US" sz="2200" dirty="0">
+                <a:sym typeface="Symbol" panose="05050102010706020507" pitchFamily="18" charset="2"/>
+              </a:rPr>
+              <a:t>% drop quantity bought smaller than % rise in the price</a:t>
+            </a:r>
+          </a:p>
+          <a:p>
+            <a:pPr lvl="1"/>
+            <a:r>
+              <a:rPr lang="en-US" altLang="en-US" sz="2200" dirty="0">
+                <a:sym typeface="Symbol" panose="05050102010706020507" pitchFamily="18" charset="2"/>
+              </a:rPr>
+              <a:t>Total expenditure (P*Q) increases when price increases</a:t>
+            </a:r>
+          </a:p>
+          <a:p>
+            <a:pPr marL="0" indent="0">
+              <a:buNone/>
+            </a:pPr>
+            <a:endParaRPr lang="en-GB" dirty="0"/>
+          </a:p>
+        </p:txBody>
+      </p:sp>
+    </p:spTree>
+    <p:extLst>
+      <p:ext uri="{BB962C8B-B14F-4D97-AF65-F5344CB8AC3E}">
+        <p14:creationId xmlns:p14="http://schemas.microsoft.com/office/powerpoint/2010/main" val="89637130"/>
+      </p:ext>
+    </p:extLst>
+  </p:cSld>
+  <p:clrMapOvr>
+    <a:masterClrMapping/>
+  </p:clrMapOvr>
+</p:sld>
+</file>
+
+<file path=ppt/slides/slide31.xml><?xml version="1.0" encoding="utf-8"?>
+<p:sld xmlns:a="http://schemas.openxmlformats.org/drawingml/2006/main" xmlns:r="http://schemas.openxmlformats.org/officeDocument/2006/relationships" xmlns:p="http://schemas.openxmlformats.org/presentationml/2006/main">
+  <p:cSld>
+    <p:spTree>
+      <p:nvGrpSpPr>
+        <p:cNvPr id="1" name=""/>
+        <p:cNvGrpSpPr/>
+        <p:nvPr/>
+      </p:nvGrpSpPr>
+      <p:grpSpPr>
+        <a:xfrm>
+          <a:off x="0" y="0"/>
+          <a:ext cx="0" cy="0"/>
+          <a:chOff x="0" y="0"/>
+          <a:chExt cx="0" cy="0"/>
+        </a:xfrm>
+      </p:grpSpPr>
+      <p:sp>
+        <p:nvSpPr>
+          <p:cNvPr id="2" name="Title 1">
+            <a:extLst>
+              <a:ext uri="{FF2B5EF4-FFF2-40B4-BE49-F238E27FC236}">
+                <a16:creationId xmlns:a16="http://schemas.microsoft.com/office/drawing/2014/main" id="{3B9B0B4A-53E4-4777-9439-06044F94E068}"/>
+              </a:ext>
+            </a:extLst>
+          </p:cNvPr>
+          <p:cNvSpPr>
+            <a:spLocks noGrp="1"/>
+          </p:cNvSpPr>
+          <p:nvPr>
+            <p:ph type="title"/>
+          </p:nvPr>
+        </p:nvSpPr>
+        <p:spPr/>
+        <p:txBody>
+          <a:bodyPr/>
+          <a:lstStyle/>
+          <a:p>
+            <a:pPr algn="ctr"/>
+            <a:r>
+              <a:rPr lang="en-US" altLang="en-US" dirty="0"/>
+              <a:t>Unit Elastic Demand</a:t>
+            </a:r>
+            <a:endParaRPr lang="en-GB" dirty="0"/>
+          </a:p>
+        </p:txBody>
+      </p:sp>
+      <p:sp>
+        <p:nvSpPr>
+          <p:cNvPr id="3" name="Content Placeholder 2">
+            <a:extLst>
+              <a:ext uri="{FF2B5EF4-FFF2-40B4-BE49-F238E27FC236}">
+                <a16:creationId xmlns:a16="http://schemas.microsoft.com/office/drawing/2014/main" id="{98A7AFB0-180E-47E7-97A3-85D1C2566731}"/>
+              </a:ext>
+            </a:extLst>
+          </p:cNvPr>
+          <p:cNvSpPr>
+            <a:spLocks noGrp="1"/>
+          </p:cNvSpPr>
+          <p:nvPr>
+            <p:ph idx="1"/>
+          </p:nvPr>
+        </p:nvSpPr>
+        <p:spPr/>
+        <p:txBody>
+          <a:bodyPr/>
+          <a:lstStyle/>
+          <a:p>
+            <a:r>
+              <a:rPr lang="en-US" altLang="en-US" sz="2400" dirty="0"/>
+              <a:t>E</a:t>
+            </a:r>
+            <a:r>
+              <a:rPr lang="en-US" altLang="en-US" sz="2400" baseline="-25000" dirty="0"/>
+              <a:t>p</a:t>
+            </a:r>
+            <a:r>
+              <a:rPr lang="en-US" altLang="en-US" sz="2400" dirty="0"/>
+              <a:t> is 1 in absolute value</a:t>
+            </a:r>
+          </a:p>
+          <a:p>
+            <a:r>
+              <a:rPr lang="en-US" altLang="en-US" sz="2400" dirty="0"/>
+              <a:t>Quantity demanded is neither relatively responsive nor unresponsive to a change in price</a:t>
+            </a:r>
+          </a:p>
+          <a:p>
+            <a:r>
+              <a:rPr lang="en-US" altLang="en-US" sz="2400" dirty="0"/>
+              <a:t>|%</a:t>
+            </a:r>
+            <a:r>
+              <a:rPr lang="en-US" altLang="en-US" sz="2400" dirty="0">
+                <a:sym typeface="Symbol" panose="05050102010706020507" pitchFamily="18" charset="2"/>
+              </a:rPr>
+              <a:t>Q| = |%P|</a:t>
+            </a:r>
+          </a:p>
+          <a:p>
+            <a:r>
+              <a:rPr lang="en-US" altLang="en-US" sz="2400" dirty="0">
+                <a:sym typeface="Symbol" panose="05050102010706020507" pitchFamily="18" charset="2"/>
+              </a:rPr>
+              <a:t>Total expenditure (P*Q) is unaffected by a price change</a:t>
+            </a:r>
+            <a:endParaRPr lang="en-US" altLang="en-US" sz="2400" dirty="0"/>
+          </a:p>
+          <a:p>
+            <a:endParaRPr lang="en-GB" dirty="0"/>
+          </a:p>
+        </p:txBody>
+      </p:sp>
+    </p:spTree>
+    <p:extLst>
+      <p:ext uri="{BB962C8B-B14F-4D97-AF65-F5344CB8AC3E}">
+        <p14:creationId xmlns:p14="http://schemas.microsoft.com/office/powerpoint/2010/main" val="4277551326"/>
+      </p:ext>
+    </p:extLst>
+  </p:cSld>
+  <p:clrMapOvr>
+    <a:masterClrMapping/>
+  </p:clrMapOvr>
+</p:sld>
+</file>
+
+<file path=ppt/slides/slide32.xml><?xml version="1.0" encoding="utf-8"?>
+<p:sld xmlns:a="http://schemas.openxmlformats.org/drawingml/2006/main" xmlns:r="http://schemas.openxmlformats.org/officeDocument/2006/relationships" xmlns:p="http://schemas.openxmlformats.org/presentationml/2006/main">
+  <p:cSld>
+    <p:spTree>
+      <p:nvGrpSpPr>
+        <p:cNvPr id="1" name=""/>
+        <p:cNvGrpSpPr/>
+        <p:nvPr/>
+      </p:nvGrpSpPr>
+      <p:grpSpPr>
+        <a:xfrm>
+          <a:off x="0" y="0"/>
+          <a:ext cx="0" cy="0"/>
+          <a:chOff x="0" y="0"/>
+          <a:chExt cx="0" cy="0"/>
+        </a:xfrm>
+      </p:grpSpPr>
+      <p:sp>
+        <p:nvSpPr>
+          <p:cNvPr id="2" name="Title 1">
+            <a:extLst>
+              <a:ext uri="{FF2B5EF4-FFF2-40B4-BE49-F238E27FC236}">
                 <a16:creationId xmlns:a16="http://schemas.microsoft.com/office/drawing/2014/main" id="{ABB0A0AB-EECA-498D-9B2D-8C49813163BE}"/>
               </a:ext>
             </a:extLst>
@@ -17144,7 +17501,7 @@
 </p:sld>
 </file>
 
-<file path=ppt/slides/slide31.xml><?xml version="1.0" encoding="utf-8"?>
+<file path=ppt/slides/slide33.xml><?xml version="1.0" encoding="utf-8"?>
 <p:sld xmlns:a="http://schemas.openxmlformats.org/drawingml/2006/main" xmlns:r="http://schemas.openxmlformats.org/officeDocument/2006/relationships" xmlns:p="http://schemas.openxmlformats.org/presentationml/2006/main">
   <p:cSld>
     <p:spTree>
@@ -17240,7 +17597,7 @@
 </p:sld>
 </file>
 
-<file path=ppt/slides/slide32.xml><?xml version="1.0" encoding="utf-8"?>
+<file path=ppt/slides/slide34.xml><?xml version="1.0" encoding="utf-8"?>
 <p:sld xmlns:a="http://schemas.openxmlformats.org/drawingml/2006/main" xmlns:r="http://schemas.openxmlformats.org/officeDocument/2006/relationships" xmlns:p="http://schemas.openxmlformats.org/presentationml/2006/main">
   <p:cSld>
     <p:spTree>
@@ -17458,7 +17815,7 @@
 </p:sld>
 </file>
 
-<file path=ppt/slides/slide33.xml><?xml version="1.0" encoding="utf-8"?>
+<file path=ppt/slides/slide35.xml><?xml version="1.0" encoding="utf-8"?>
 <p:sld xmlns:a="http://schemas.openxmlformats.org/drawingml/2006/main" xmlns:r="http://schemas.openxmlformats.org/officeDocument/2006/relationships" xmlns:p="http://schemas.openxmlformats.org/presentationml/2006/main">
   <p:cSld>
     <p:spTree>
@@ -17580,7 +17937,148 @@
 </p:sld>
 </file>
 
-<file path=ppt/slides/slide34.xml><?xml version="1.0" encoding="utf-8"?>
+<file path=ppt/slides/slide36.xml><?xml version="1.0" encoding="utf-8"?>
+<p:sld xmlns:a="http://schemas.openxmlformats.org/drawingml/2006/main" xmlns:r="http://schemas.openxmlformats.org/officeDocument/2006/relationships" xmlns:p="http://schemas.openxmlformats.org/presentationml/2006/main">
+  <p:cSld>
+    <p:spTree>
+      <p:nvGrpSpPr>
+        <p:cNvPr id="1" name=""/>
+        <p:cNvGrpSpPr/>
+        <p:nvPr/>
+      </p:nvGrpSpPr>
+      <p:grpSpPr>
+        <a:xfrm>
+          <a:off x="0" y="0"/>
+          <a:ext cx="0" cy="0"/>
+          <a:chOff x="0" y="0"/>
+          <a:chExt cx="0" cy="0"/>
+        </a:xfrm>
+      </p:grpSpPr>
+      <p:sp>
+        <p:nvSpPr>
+          <p:cNvPr id="2" name="Title 1">
+            <a:extLst>
+              <a:ext uri="{FF2B5EF4-FFF2-40B4-BE49-F238E27FC236}">
+                <a16:creationId xmlns:a16="http://schemas.microsoft.com/office/drawing/2014/main" id="{9FD9761F-A0FD-450A-A934-EB16C7450F79}"/>
+              </a:ext>
+            </a:extLst>
+          </p:cNvPr>
+          <p:cNvSpPr>
+            <a:spLocks noGrp="1"/>
+          </p:cNvSpPr>
+          <p:nvPr>
+            <p:ph type="title"/>
+          </p:nvPr>
+        </p:nvSpPr>
+        <p:spPr/>
+        <p:txBody>
+          <a:bodyPr/>
+          <a:lstStyle/>
+          <a:p>
+            <a:pPr algn="ctr"/>
+            <a:r>
+              <a:rPr lang="en-GB" dirty="0"/>
+              <a:t>Elasticity in the News: 2026 Update</a:t>
+            </a:r>
+          </a:p>
+        </p:txBody>
+      </p:sp>
+      <p:sp>
+        <p:nvSpPr>
+          <p:cNvPr id="3" name="Content Placeholder 2">
+            <a:extLst>
+              <a:ext uri="{FF2B5EF4-FFF2-40B4-BE49-F238E27FC236}">
+                <a16:creationId xmlns:a16="http://schemas.microsoft.com/office/drawing/2014/main" id="{3146C452-B461-40CB-9E9E-E5395F71474E}"/>
+              </a:ext>
+            </a:extLst>
+          </p:cNvPr>
+          <p:cNvSpPr>
+            <a:spLocks noGrp="1"/>
+          </p:cNvSpPr>
+          <p:nvPr>
+            <p:ph idx="1"/>
+          </p:nvPr>
+        </p:nvSpPr>
+        <p:spPr/>
+        <p:txBody>
+          <a:bodyPr/>
+          <a:lstStyle/>
+          <a:p>
+            <a:pPr>
+              <a:spcBef>
+                <a:spcPct val="0"/>
+              </a:spcBef>
+              <a:buSzTx/>
+              <a:buFontTx/>
+              <a:buNone/>
+            </a:pPr>
+            <a:r>
+              <a:rPr lang="en-US" altLang="en-US" sz="1800" b="0" dirty="0">
+                <a:cs typeface="Times New Roman" panose="02020603050405020304" pitchFamily="18" charset="0"/>
+              </a:rPr>
+              <a:t>Twelve years after that Wells Fargo quote, the story repeats: U.S. ground coffee hit a record $9.46 a pound in February 2026, up 31% year-over-year. Coffee drinkers still are not switching to tea or soda — they are staying in the category but trading down to home brewing and store-brand beans instead.</a:t>
+            </a:r>
+          </a:p>
+          <a:p>
+            <a:pPr>
+              <a:spcBef>
+                <a:spcPct val="0"/>
+              </a:spcBef>
+              <a:buSzTx/>
+              <a:buFontTx/>
+              <a:buNone/>
+            </a:pPr>
+            <a:r>
+              <a:rPr lang="en-US" altLang="en-US" sz="1800" b="0" dirty="0">
+                <a:cs typeface="Times New Roman" panose="02020603050405020304" pitchFamily="18" charset="0"/>
+              </a:rPr>
+              <a:t>- “</a:t>
+            </a:r>
+            <a:r>
+              <a:rPr lang="en-US" altLang="en-US" sz="1400" b="0" dirty="0">
+                <a:cs typeface="Times New Roman" panose="02020603050405020304" pitchFamily="18" charset="0"/>
+                <a:hlinkClick r:id="rId2"/>
+              </a:rPr>
+              <a:t>U.S. coffee prices are surging at a record pace,” TheStreet, H. Remy, based on Bloomberg/BLS data, March 18, 2026</a:t>
+            </a:r>
+          </a:p>
+          <a:p>
+            <a:pPr>
+              <a:spcBef>
+                <a:spcPct val="0"/>
+              </a:spcBef>
+              <a:buSzTx/>
+              <a:buFontTx/>
+              <a:buNone/>
+            </a:pPr>
+            <a:r>
+              <a:rPr lang="en-US" altLang="en-US" sz="1200" i="1" dirty="0">
+                <a:solidFill>
+                  <a:srgbClr val="D9D9D9"/>
+                </a:solidFill>
+              </a:rPr>
+              <a:t>Source: thestreet.com/retail/u-s-coffee-prices-are-surging-at-a-record-pace</a:t>
+            </a:r>
+          </a:p>
+          <a:p>
+            <a:endParaRPr lang="en-GB" dirty="0"/>
+          </a:p>
+        </p:txBody>
+      </p:sp>
+    </p:spTree>
+    <p:extLst>
+      <p:ext uri="{BB962C8B-B14F-4D97-AF65-F5344CB8AC3E}">
+        <p14:creationId xmlns:p14="http://schemas.microsoft.com/office/powerpoint/2010/main" val="996915976"/>
+      </p:ext>
+    </p:extLst>
+  </p:cSld>
+  <p:clrMapOvr>
+    <a:masterClrMapping/>
+  </p:clrMapOvr>
+</p:sld>
+</file>
+
+<file path=ppt/slides/slide37.xml><?xml version="1.0" encoding="utf-8"?>
 <p:sld xmlns:a="http://schemas.openxmlformats.org/drawingml/2006/main" xmlns:r="http://schemas.openxmlformats.org/officeDocument/2006/relationships" xmlns:p="http://schemas.openxmlformats.org/presentationml/2006/main">
   <p:cSld>
     <p:spTree>
@@ -17720,7 +18218,187 @@
 </p:sld>
 </file>
 
-<file path=ppt/slides/slide35.xml><?xml version="1.0" encoding="utf-8"?>
+<file path=ppt/slides/slide38.xml><?xml version="1.0" encoding="utf-8"?>
+<p:sld xmlns:a="http://schemas.openxmlformats.org/drawingml/2006/main" xmlns:r="http://schemas.openxmlformats.org/officeDocument/2006/relationships" xmlns:p="http://schemas.openxmlformats.org/presentationml/2006/main">
+  <p:cSld>
+    <p:spTree>
+      <p:nvGrpSpPr>
+        <p:cNvPr id="1" name=""/>
+        <p:cNvGrpSpPr/>
+        <p:nvPr/>
+      </p:nvGrpSpPr>
+      <p:grpSpPr>
+        <a:xfrm>
+          <a:off x="0" y="0"/>
+          <a:ext cx="0" cy="0"/>
+          <a:chOff x="0" y="0"/>
+          <a:chExt cx="0" cy="0"/>
+        </a:xfrm>
+      </p:grpSpPr>
+      <p:sp>
+        <p:nvSpPr>
+          <p:cNvPr id="2" name="Title 1">
+            <a:extLst>
+              <a:ext uri="{FF2B5EF4-FFF2-40B4-BE49-F238E27FC236}">
+                <a16:creationId xmlns:a16="http://schemas.microsoft.com/office/drawing/2014/main" id="{DC196E46-5E2B-4402-AB98-EE2CF234AAC0}"/>
+              </a:ext>
+            </a:extLst>
+          </p:cNvPr>
+          <p:cNvSpPr>
+            <a:spLocks noGrp="1"/>
+          </p:cNvSpPr>
+          <p:nvPr>
+            <p:ph type="title"/>
+          </p:nvPr>
+        </p:nvSpPr>
+        <p:spPr/>
+        <p:txBody>
+          <a:bodyPr/>
+          <a:lstStyle/>
+          <a:p>
+            <a:pPr algn="ctr"/>
+            <a:r>
+              <a:rPr lang="en-GB" dirty="0"/>
+              <a:t>Gasoline vs Grapefruits: 2026 Update</a:t>
+            </a:r>
+          </a:p>
+        </p:txBody>
+      </p:sp>
+      <p:sp>
+        <p:nvSpPr>
+          <p:cNvPr id="3" name="Content Placeholder 2">
+            <a:extLst>
+              <a:ext uri="{FF2B5EF4-FFF2-40B4-BE49-F238E27FC236}">
+                <a16:creationId xmlns:a16="http://schemas.microsoft.com/office/drawing/2014/main" id="{ACB27703-65BF-47D2-9676-D16470FAC3D6}"/>
+              </a:ext>
+            </a:extLst>
+          </p:cNvPr>
+          <p:cNvSpPr>
+            <a:spLocks noGrp="1"/>
+          </p:cNvSpPr>
+          <p:nvPr>
+            <p:ph idx="1"/>
+          </p:nvPr>
+        </p:nvSpPr>
+        <p:spPr/>
+        <p:txBody>
+          <a:bodyPr/>
+          <a:lstStyle/>
+          <a:p>
+            <a:pPr eaLnBrk="1" hangingPunct="1">
+              <a:defRPr/>
+            </a:pPr>
+            <a:r>
+              <a:rPr lang="en-US" altLang="en-US" sz="1800" dirty="0"/>
+              <a:t>Congress debated a federal gas tax holiday for summer 2026. Analysts noted that in the short run, both sides of the market stay inelastic: drivers still need fuel regardless of small price changes, so much of any tax cut would be captured by suppliers as higher margins rather than passed through to consumers. </a:t>
+            </a:r>
+            <a:r>
+              <a:rPr lang="en-US" altLang="en-US" sz="1800" i="1" dirty="0">
+                <a:solidFill>
+                  <a:srgbClr val="92D050"/>
+                </a:solidFill>
+              </a:rPr>
+              <a:t>Short-run gas demand is still barely price-sensitive.</a:t>
+            </a:r>
+            <a:br>
+              <a:rPr lang="en-US" altLang="en-US" sz="1600" b="1" i="1" dirty="0"/>
+            </a:br>
+            <a:r>
+              <a:rPr lang="en-US" altLang="en-US" sz="1800" i="1" dirty="0"/>
+              <a:t>- </a:t>
+            </a:r>
+            <a:r>
+              <a:rPr lang="en-US" altLang="en-US" sz="1800" dirty="0">
+                <a:hlinkClick r:id="rId2"/>
+              </a:rPr>
+              <a:t>Penn Wharton Budget Model, May 11, 2026 </a:t>
+            </a:r>
+          </a:p>
+          <a:p>
+            <a:pPr eaLnBrk="1" hangingPunct="1">
+              <a:defRPr/>
+            </a:pPr>
+            <a:r>
+              <a:rPr lang="en-US" altLang="en-US" sz="1800" dirty="0"/>
+              <a:t>… Meanwhile in the citrus aisle: with Florida’s grapefruit and orange crop still near a century low, global orange juice demand is projected to fall another 3% in 2026/27 — part of a roughly 40% decline over the past decade — as consumers cut purchases or trade down to cheaper alternatives even though retail prices remain near record highs.</a:t>
+            </a:r>
+            <a:r>
+              <a:rPr lang="en-US" altLang="en-US" dirty="0"/>
+              <a:t> </a:t>
+            </a:r>
+          </a:p>
+          <a:p>
+            <a:pPr marL="0" indent="0" eaLnBrk="1" hangingPunct="1">
+              <a:buFont typeface="Wingdings" panose="05000000000000000000" pitchFamily="2" charset="2"/>
+              <a:buNone/>
+              <a:defRPr/>
+            </a:pPr>
+            <a:r>
+              <a:rPr lang="en-US" altLang="en-US" sz="1600" dirty="0"/>
+              <a:t>     </a:t>
+            </a:r>
+            <a:r>
+              <a:rPr lang="en-US" altLang="en-US" sz="1800" dirty="0">
+                <a:hlinkClick r:id="rId3"/>
+              </a:rPr>
+              <a:t>-Rabobank, reported via FreshFruitPortal &amp; Citrus Industry Magazine, June 2026</a:t>
+            </a:r>
+          </a:p>
+          <a:p>
+            <a:pPr>
+              <a:spcBef>
+                <a:spcPct val="0"/>
+              </a:spcBef>
+              <a:buSzTx/>
+              <a:buFontTx/>
+              <a:buNone/>
+            </a:pPr>
+            <a:r>
+              <a:rPr lang="en-US" altLang="en-US" sz="1100" i="1" dirty="0">
+                <a:solidFill>
+                  <a:srgbClr val="D9D9D9"/>
+                </a:solidFill>
+              </a:rPr>
+              <a:t>Source (gas): budgetmodel.wharton.upenn.edu/blog/BE2026-3</a:t>
+            </a:r>
+          </a:p>
+          <a:p>
+            <a:pPr>
+              <a:spcBef>
+                <a:spcPct val="0"/>
+              </a:spcBef>
+              <a:buSzTx/>
+              <a:buFontTx/>
+              <a:buNone/>
+            </a:pPr>
+            <a:r>
+              <a:rPr lang="en-US" altLang="en-US" sz="1100" i="1" dirty="0">
+                <a:solidFill>
+                  <a:srgbClr val="D9D9D9"/>
+                </a:solidFill>
+              </a:rPr>
+              <a:t>Source (OJ): freshfruitportal.com/news/2026/06/01/orange-juice-drop</a:t>
+            </a:r>
+          </a:p>
+          <a:p>
+            <a:endParaRPr lang="en-GB" dirty="0"/>
+          </a:p>
+        </p:txBody>
+      </p:sp>
+    </p:spTree>
+    <p:extLst>
+      <p:ext uri="{BB962C8B-B14F-4D97-AF65-F5344CB8AC3E}">
+        <p14:creationId xmlns:p14="http://schemas.microsoft.com/office/powerpoint/2010/main" val="1656191188"/>
+      </p:ext>
+    </p:extLst>
+  </p:cSld>
+  <p:clrMapOvr>
+    <a:masterClrMapping/>
+  </p:clrMapOvr>
+</p:sld>
+</file>
+
+<file path=ppt/slides/slide39.xml><?xml version="1.0" encoding="utf-8"?>
 <p:sld xmlns:a="http://schemas.openxmlformats.org/drawingml/2006/main" xmlns:r="http://schemas.openxmlformats.org/officeDocument/2006/relationships" xmlns:p="http://schemas.openxmlformats.org/presentationml/2006/main">
   <p:cSld>
     <p:spTree>
@@ -17829,7 +18507,116 @@
 </p:sld>
 </file>
 
-<file path=ppt/slides/slide36.xml><?xml version="1.0" encoding="utf-8"?>
+<file path=ppt/slides/slide4.xml><?xml version="1.0" encoding="utf-8"?>
+<p:sld xmlns:a="http://schemas.openxmlformats.org/drawingml/2006/main" xmlns:r="http://schemas.openxmlformats.org/officeDocument/2006/relationships" xmlns:p="http://schemas.openxmlformats.org/presentationml/2006/main">
+  <p:cSld>
+    <p:spTree>
+      <p:nvGrpSpPr>
+        <p:cNvPr id="1" name=""/>
+        <p:cNvGrpSpPr/>
+        <p:nvPr/>
+      </p:nvGrpSpPr>
+      <p:grpSpPr>
+        <a:xfrm>
+          <a:off x="0" y="0"/>
+          <a:ext cx="0" cy="0"/>
+          <a:chOff x="0" y="0"/>
+          <a:chExt cx="0" cy="0"/>
+        </a:xfrm>
+      </p:grpSpPr>
+      <p:sp>
+        <p:nvSpPr>
+          <p:cNvPr id="2" name="Title 1">
+            <a:extLst>
+              <a:ext uri="{FF2B5EF4-FFF2-40B4-BE49-F238E27FC236}">
+                <a16:creationId xmlns:a16="http://schemas.microsoft.com/office/drawing/2014/main" id="{A77BED49-8D96-4399-83D4-396828225BE7}"/>
+              </a:ext>
+            </a:extLst>
+          </p:cNvPr>
+          <p:cNvSpPr>
+            <a:spLocks noGrp="1"/>
+          </p:cNvSpPr>
+          <p:nvPr>
+            <p:ph type="title"/>
+          </p:nvPr>
+        </p:nvSpPr>
+        <p:spPr/>
+        <p:txBody>
+          <a:bodyPr/>
+          <a:lstStyle/>
+          <a:p>
+            <a:pPr algn="ctr"/>
+            <a:r>
+              <a:rPr lang="en-US" dirty="0"/>
+              <a:t>Demand’s Factors</a:t>
+            </a:r>
+          </a:p>
+        </p:txBody>
+      </p:sp>
+      <p:sp>
+        <p:nvSpPr>
+          <p:cNvPr id="3" name="Content Placeholder 2">
+            <a:extLst>
+              <a:ext uri="{FF2B5EF4-FFF2-40B4-BE49-F238E27FC236}">
+                <a16:creationId xmlns:a16="http://schemas.microsoft.com/office/drawing/2014/main" id="{23098DAD-D0EB-4E6F-83C4-BF0416B344FF}"/>
+              </a:ext>
+            </a:extLst>
+          </p:cNvPr>
+          <p:cNvSpPr>
+            <a:spLocks noGrp="1"/>
+          </p:cNvSpPr>
+          <p:nvPr>
+            <p:ph idx="1"/>
+          </p:nvPr>
+        </p:nvSpPr>
+        <p:spPr/>
+        <p:txBody>
+          <a:bodyPr>
+            <a:normAutofit/>
+          </a:bodyPr>
+          <a:lstStyle/>
+          <a:p>
+            <a:r>
+              <a:rPr lang="en-US" sz="2400" dirty="0"/>
+              <a:t>Each factor has a unique impact on the Demand</a:t>
+            </a:r>
+          </a:p>
+          <a:p>
+            <a:r>
+              <a:rPr lang="en-US" sz="2400" dirty="0"/>
+              <a:t>All these factors usually change simultaneously and influence each other</a:t>
+            </a:r>
+          </a:p>
+          <a:p>
+            <a:r>
+              <a:rPr lang="en-US" sz="2400" dirty="0"/>
+              <a:t>To understand how one factor affects demand, we must assume that all the other factors do not change over time (</a:t>
+            </a:r>
+            <a:r>
+              <a:rPr lang="en-US" sz="2400" i="1" dirty="0"/>
+              <a:t>ceteris paribus </a:t>
+            </a:r>
+            <a:r>
+              <a:rPr lang="en-US" sz="2400" dirty="0"/>
+              <a:t>principle)</a:t>
+            </a:r>
+          </a:p>
+        </p:txBody>
+      </p:sp>
+    </p:spTree>
+    <p:extLst>
+      <p:ext uri="{BB962C8B-B14F-4D97-AF65-F5344CB8AC3E}">
+        <p14:creationId xmlns:p14="http://schemas.microsoft.com/office/powerpoint/2010/main" val="2952385952"/>
+      </p:ext>
+    </p:extLst>
+  </p:cSld>
+  <p:clrMapOvr>
+    <a:masterClrMapping/>
+  </p:clrMapOvr>
+</p:sld>
+</file>
+
+<file path=ppt/slides/slide40.xml><?xml version="1.0" encoding="utf-8"?>
 <p:sld xmlns:a="http://schemas.openxmlformats.org/drawingml/2006/main" xmlns:r="http://schemas.openxmlformats.org/officeDocument/2006/relationships" xmlns:p="http://schemas.openxmlformats.org/presentationml/2006/main">
   <p:cSld>
     <p:spTree>
@@ -17987,7 +18774,7 @@
 </p:sld>
 </file>
 
-<file path=ppt/slides/slide37.xml><?xml version="1.0" encoding="utf-8"?>
+<file path=ppt/slides/slide41.xml><?xml version="1.0" encoding="utf-8"?>
 <p:sld xmlns:a="http://schemas.openxmlformats.org/drawingml/2006/main" xmlns:r="http://schemas.openxmlformats.org/officeDocument/2006/relationships" xmlns:p="http://schemas.openxmlformats.org/presentationml/2006/main">
   <p:cSld>
     <p:spTree>
@@ -18049,7 +18836,7 @@
 </p:sld>
 </file>
 
-<file path=ppt/slides/slide38.xml><?xml version="1.0" encoding="utf-8"?>
+<file path=ppt/slides/slide42.xml><?xml version="1.0" encoding="utf-8"?>
 <p:sld xmlns:a="http://schemas.openxmlformats.org/drawingml/2006/main" xmlns:r="http://schemas.openxmlformats.org/officeDocument/2006/relationships" xmlns:p="http://schemas.openxmlformats.org/presentationml/2006/main">
   <p:cSld>
     <p:spTree>
@@ -18109,7 +18896,7 @@
 </p:sld>
 </file>
 
-<file path=ppt/slides/slide39.xml><?xml version="1.0" encoding="utf-8"?>
+<file path=ppt/slides/slide43.xml><?xml version="1.0" encoding="utf-8"?>
 <p:sld xmlns:a="http://schemas.openxmlformats.org/drawingml/2006/main" xmlns:r="http://schemas.openxmlformats.org/officeDocument/2006/relationships" xmlns:p="http://schemas.openxmlformats.org/presentationml/2006/main">
   <p:cSld>
     <p:spTree>
@@ -18171,72 +18958,128 @@
             <p:ph idx="1"/>
           </p:nvPr>
         </p:nvSpPr>
-        <p:spPr/>
+        <p:spPr>
+          <a:xfrm>
+            <a:off x="628650" y="1425383"/>
+            <a:ext cx="3657600" cy="3330732"/>
+          </a:xfrm>
+        </p:spPr>
         <p:txBody>
           <a:bodyPr/>
           <a:lstStyle/>
           <a:p>
             <a:pPr>
               <a:lnSpc>
-                <a:spcPct val="90000"/>
+                <a:spcPct val="100000"/>
               </a:lnSpc>
             </a:pPr>
             <a:r>
-              <a:rPr lang="en-US" altLang="en-US" sz="2400" dirty="0"/>
-              <a:t>Demand curves </a:t>
-            </a:r>
-            <a:r>
-              <a:rPr lang="en-US" altLang="en-US" sz="2400" u="sng" dirty="0"/>
-              <a:t>do not</a:t>
-            </a:r>
-            <a:r>
-              <a:rPr lang="en-US" altLang="en-US" sz="2400" dirty="0"/>
-              <a:t> shift due to changes supply.</a:t>
+              <a:rPr lang="en-US" altLang="en-US" sz="2000" dirty="0"/>
+              <a:t>A change in </a:t>
+            </a:r>
+            <a:r>
+              <a:rPr lang="en-US" altLang="en-US" sz="2000" u="sng" dirty="0"/>
+              <a:t>supply</a:t>
+            </a:r>
+            <a:r>
+              <a:rPr lang="en-US" altLang="en-US" sz="2000" dirty="0"/>
+              <a:t> does </a:t>
+            </a:r>
+            <a:r>
+              <a:rPr lang="en-US" altLang="en-US" sz="2000" u="sng" dirty="0"/>
+              <a:t>not</a:t>
+            </a:r>
+            <a:r>
+              <a:rPr lang="en-US" altLang="en-US" sz="2000" dirty="0"/>
+              <a:t> shift the demand curve.</a:t>
             </a:r>
           </a:p>
           <a:p>
             <a:pPr>
               <a:lnSpc>
-                <a:spcPct val="90000"/>
+                <a:spcPct val="100000"/>
               </a:lnSpc>
             </a:pPr>
             <a:r>
-              <a:rPr lang="en-US" altLang="en-US" sz="2400" dirty="0"/>
-              <a:t>Shifts in supply change the equilibrium price causing a shift </a:t>
-            </a:r>
-            <a:r>
-              <a:rPr lang="en-US" altLang="en-US" sz="2400" u="sng" dirty="0"/>
-              <a:t>along</a:t>
-            </a:r>
-            <a:r>
-              <a:rPr lang="en-US" altLang="en-US" sz="2400" dirty="0"/>
-              <a:t> the demand curve.</a:t>
+              <a:rPr lang="en-US" altLang="en-US" sz="2000" dirty="0"/>
+              <a:t>Instead, it shifts the </a:t>
+            </a:r>
+            <a:r>
+              <a:rPr lang="en-US" altLang="en-US" sz="2000" u="sng" dirty="0"/>
+              <a:t>supply</a:t>
+            </a:r>
+            <a:r>
+              <a:rPr lang="en-US" altLang="en-US" sz="2000" dirty="0"/>
+              <a:t> curve, which changes the equilibrium price.</a:t>
             </a:r>
           </a:p>
           <a:p>
             <a:pPr>
               <a:lnSpc>
-                <a:spcPct val="90000"/>
+                <a:spcPct val="100000"/>
               </a:lnSpc>
             </a:pPr>
             <a:r>
-              <a:rPr lang="en-US" altLang="en-US" sz="2400" dirty="0"/>
-              <a:t>Shifts in supply cause a change in the </a:t>
-            </a:r>
-            <a:r>
-              <a:rPr lang="en-US" altLang="en-US" sz="2400" u="sng" dirty="0"/>
-              <a:t>quantity demand</a:t>
-            </a:r>
-            <a:r>
-              <a:rPr lang="en-US" altLang="en-US" sz="2400" dirty="0"/>
-              <a:t> not a shift in the demand curve.</a:t>
-            </a:r>
-          </a:p>
-          <a:p>
+              <a:rPr lang="en-US" altLang="en-US" sz="2000" dirty="0"/>
+              <a:t>That new price causes a movement </a:t>
+            </a:r>
+            <a:r>
+              <a:rPr lang="en-US" altLang="en-US" sz="2000" u="sng" dirty="0"/>
+              <a:t>along</a:t>
+            </a:r>
+            <a:r>
+              <a:rPr lang="en-US" altLang="en-US" sz="2000" dirty="0"/>
+              <a:t> the demand curve — a change in </a:t>
+            </a:r>
+            <a:r>
+              <a:rPr lang="en-US" altLang="en-US" sz="2000" i="1" dirty="0"/>
+              <a:t>quantity demanded</a:t>
+            </a:r>
+            <a:r>
+              <a:rPr lang="en-US" altLang="en-US" sz="2000" dirty="0"/>
+              <a:t>, not a shift in </a:t>
+            </a:r>
+            <a:r>
+              <a:rPr lang="en-US" altLang="en-US" sz="2000" i="1" dirty="0"/>
+              <a:t>demand</a:t>
+            </a:r>
+            <a:r>
+              <a:rPr lang="en-US" altLang="en-US" sz="2000" dirty="0"/>
+              <a:t>.</a:t>
+            </a:r>
+          </a:p>
+          <a:p>
+            <a:pPr marL="0" indent="0">
+              <a:buNone/>
+            </a:pPr>
             <a:endParaRPr lang="en-GB" dirty="0"/>
           </a:p>
         </p:txBody>
       </p:sp>
+      <p:pic>
+        <p:nvPicPr>
+          <p:cNvPr id="9" name="Chart"/>
+          <p:cNvPicPr>
+            <a:picLocks noChangeAspect="1"/>
+          </p:cNvPicPr>
+          <p:nvPr/>
+        </p:nvPicPr>
+        <p:blipFill>
+          <a:blip r:embed="rId2"/>
+          <a:stretch>
+            <a:fillRect/>
+          </a:stretch>
+        </p:blipFill>
+        <p:spPr>
+          <a:xfrm>
+            <a:off x="4423410" y="1425383"/>
+            <a:ext cx="3608292" cy="3330732"/>
+          </a:xfrm>
+          <a:prstGeom prst="rect">
+            <a:avLst/>
+          </a:prstGeom>
+        </p:spPr>
+      </p:pic>
     </p:spTree>
     <p:extLst>
       <p:ext uri="{BB962C8B-B14F-4D97-AF65-F5344CB8AC3E}">
@@ -18250,116 +19093,7 @@
 </p:sld>
 </file>
 
-<file path=ppt/slides/slide4.xml><?xml version="1.0" encoding="utf-8"?>
-<p:sld xmlns:a="http://schemas.openxmlformats.org/drawingml/2006/main" xmlns:r="http://schemas.openxmlformats.org/officeDocument/2006/relationships" xmlns:p="http://schemas.openxmlformats.org/presentationml/2006/main">
-  <p:cSld>
-    <p:spTree>
-      <p:nvGrpSpPr>
-        <p:cNvPr id="1" name=""/>
-        <p:cNvGrpSpPr/>
-        <p:nvPr/>
-      </p:nvGrpSpPr>
-      <p:grpSpPr>
-        <a:xfrm>
-          <a:off x="0" y="0"/>
-          <a:ext cx="0" cy="0"/>
-          <a:chOff x="0" y="0"/>
-          <a:chExt cx="0" cy="0"/>
-        </a:xfrm>
-      </p:grpSpPr>
-      <p:sp>
-        <p:nvSpPr>
-          <p:cNvPr id="2" name="Title 1">
-            <a:extLst>
-              <a:ext uri="{FF2B5EF4-FFF2-40B4-BE49-F238E27FC236}">
-                <a16:creationId xmlns:a16="http://schemas.microsoft.com/office/drawing/2014/main" id="{A77BED49-8D96-4399-83D4-396828225BE7}"/>
-              </a:ext>
-            </a:extLst>
-          </p:cNvPr>
-          <p:cNvSpPr>
-            <a:spLocks noGrp="1"/>
-          </p:cNvSpPr>
-          <p:nvPr>
-            <p:ph type="title"/>
-          </p:nvPr>
-        </p:nvSpPr>
-        <p:spPr/>
-        <p:txBody>
-          <a:bodyPr/>
-          <a:lstStyle/>
-          <a:p>
-            <a:pPr algn="ctr"/>
-            <a:r>
-              <a:rPr lang="en-US" dirty="0"/>
-              <a:t>Demand’s Factors</a:t>
-            </a:r>
-          </a:p>
-        </p:txBody>
-      </p:sp>
-      <p:sp>
-        <p:nvSpPr>
-          <p:cNvPr id="3" name="Content Placeholder 2">
-            <a:extLst>
-              <a:ext uri="{FF2B5EF4-FFF2-40B4-BE49-F238E27FC236}">
-                <a16:creationId xmlns:a16="http://schemas.microsoft.com/office/drawing/2014/main" id="{23098DAD-D0EB-4E6F-83C4-BF0416B344FF}"/>
-              </a:ext>
-            </a:extLst>
-          </p:cNvPr>
-          <p:cNvSpPr>
-            <a:spLocks noGrp="1"/>
-          </p:cNvSpPr>
-          <p:nvPr>
-            <p:ph idx="1"/>
-          </p:nvPr>
-        </p:nvSpPr>
-        <p:spPr/>
-        <p:txBody>
-          <a:bodyPr>
-            <a:normAutofit/>
-          </a:bodyPr>
-          <a:lstStyle/>
-          <a:p>
-            <a:r>
-              <a:rPr lang="en-US" sz="2400" dirty="0"/>
-              <a:t>Each factor has a unique impact on the Demand</a:t>
-            </a:r>
-          </a:p>
-          <a:p>
-            <a:r>
-              <a:rPr lang="en-US" sz="2400" dirty="0"/>
-              <a:t>All these factors usually change simultaneously and influence each other</a:t>
-            </a:r>
-          </a:p>
-          <a:p>
-            <a:r>
-              <a:rPr lang="en-US" sz="2400" dirty="0"/>
-              <a:t>To understand how one factor affects demand, we must assume that all the other factors do not change over time (</a:t>
-            </a:r>
-            <a:r>
-              <a:rPr lang="en-US" sz="2400" i="1" dirty="0"/>
-              <a:t>ceteris paribus </a:t>
-            </a:r>
-            <a:r>
-              <a:rPr lang="en-US" sz="2400" dirty="0"/>
-              <a:t>principle)</a:t>
-            </a:r>
-          </a:p>
-        </p:txBody>
-      </p:sp>
-    </p:spTree>
-    <p:extLst>
-      <p:ext uri="{BB962C8B-B14F-4D97-AF65-F5344CB8AC3E}">
-        <p14:creationId xmlns:p14="http://schemas.microsoft.com/office/powerpoint/2010/main" val="2952385952"/>
-      </p:ext>
-    </p:extLst>
-  </p:cSld>
-  <p:clrMapOvr>
-    <a:masterClrMapping/>
-  </p:clrMapOvr>
-</p:sld>
-</file>
-
-<file path=ppt/slides/slide40.xml><?xml version="1.0" encoding="utf-8"?>
+<file path=ppt/slides/slide44.xml><?xml version="1.0" encoding="utf-8"?>
 <p:sld xmlns:a="http://schemas.openxmlformats.org/drawingml/2006/main" xmlns:r="http://schemas.openxmlformats.org/officeDocument/2006/relationships" xmlns:p="http://schemas.openxmlformats.org/presentationml/2006/main">
   <p:cSld>
     <p:spTree>
@@ -18462,7 +19196,7 @@
 </p:sld>
 </file>
 
-<file path=ppt/slides/slide41.xml><?xml version="1.0" encoding="utf-8"?>
+<file path=ppt/slides/slide45.xml><?xml version="1.0" encoding="utf-8"?>
 <p:sld xmlns:a="http://schemas.openxmlformats.org/drawingml/2006/main" xmlns:r="http://schemas.openxmlformats.org/officeDocument/2006/relationships" xmlns:p="http://schemas.openxmlformats.org/presentationml/2006/main">
   <p:cSld>
     <p:spTree>
@@ -18586,7 +19320,7 @@
 </p:sld>
 </file>
 
-<file path=ppt/slides/slide42.xml><?xml version="1.0" encoding="utf-8"?>
+<file path=ppt/slides/slide46.xml><?xml version="1.0" encoding="utf-8"?>
 <p:sld xmlns:a="http://schemas.openxmlformats.org/drawingml/2006/main" xmlns:r="http://schemas.openxmlformats.org/officeDocument/2006/relationships" xmlns:p="http://schemas.openxmlformats.org/presentationml/2006/main">
   <p:cSld>
     <p:spTree>
@@ -18700,7 +19434,7 @@
 </p:sld>
 </file>
 
-<file path=ppt/slides/slide43.xml><?xml version="1.0" encoding="utf-8"?>
+<file path=ppt/slides/slide47.xml><?xml version="1.0" encoding="utf-8"?>
 <p:sld xmlns:a="http://schemas.openxmlformats.org/drawingml/2006/main" xmlns:r="http://schemas.openxmlformats.org/officeDocument/2006/relationships" xmlns:p="http://schemas.openxmlformats.org/presentationml/2006/main">
   <p:cSld>
     <p:spTree>
@@ -18832,7 +19566,7 @@
 </p:sld>
 </file>
 
-<file path=ppt/slides/slide44.xml><?xml version="1.0" encoding="utf-8"?>
+<file path=ppt/slides/slide48.xml><?xml version="1.0" encoding="utf-8"?>
 <p:sld xmlns:a="http://schemas.openxmlformats.org/drawingml/2006/main" xmlns:r="http://schemas.openxmlformats.org/officeDocument/2006/relationships" xmlns:p="http://schemas.openxmlformats.org/presentationml/2006/main">
   <p:cSld>
     <p:spTree>
@@ -18923,7 +19657,7 @@
 </p:sld>
 </file>
 
-<file path=ppt/slides/slide45.xml><?xml version="1.0" encoding="utf-8"?>
+<file path=ppt/slides/slide49.xml><?xml version="1.0" encoding="utf-8"?>
 <p:sld xmlns:a="http://schemas.openxmlformats.org/drawingml/2006/main" xmlns:r="http://schemas.openxmlformats.org/officeDocument/2006/relationships" xmlns:p="http://schemas.openxmlformats.org/presentationml/2006/main">
   <p:cSld>
     <p:spTree>
@@ -19027,248 +19761,6 @@
     <p:extLst>
       <p:ext uri="{BB962C8B-B14F-4D97-AF65-F5344CB8AC3E}">
         <p14:creationId xmlns:p14="http://schemas.microsoft.com/office/powerpoint/2010/main" val="4162334027"/>
-      </p:ext>
-    </p:extLst>
-  </p:cSld>
-  <p:clrMapOvr>
-    <a:masterClrMapping/>
-  </p:clrMapOvr>
-</p:sld>
-</file>
-
-<file path=ppt/slides/slide46.xml><?xml version="1.0" encoding="utf-8"?>
-<p:sld xmlns:a="http://schemas.openxmlformats.org/drawingml/2006/main" xmlns:r="http://schemas.openxmlformats.org/officeDocument/2006/relationships" xmlns:p="http://schemas.openxmlformats.org/presentationml/2006/main">
-  <p:cSld>
-    <p:spTree>
-      <p:nvGrpSpPr>
-        <p:cNvPr id="1" name=""/>
-        <p:cNvGrpSpPr/>
-        <p:nvPr/>
-      </p:nvGrpSpPr>
-      <p:grpSpPr>
-        <a:xfrm>
-          <a:off x="0" y="0"/>
-          <a:ext cx="0" cy="0"/>
-          <a:chOff x="0" y="0"/>
-          <a:chExt cx="0" cy="0"/>
-        </a:xfrm>
-      </p:grpSpPr>
-      <p:sp>
-        <p:nvSpPr>
-          <p:cNvPr id="2" name="Title 1">
-            <a:extLst>
-              <a:ext uri="{FF2B5EF4-FFF2-40B4-BE49-F238E27FC236}">
-                <a16:creationId xmlns:a16="http://schemas.microsoft.com/office/drawing/2014/main" id="{AFF2E352-8DE9-4BB7-84A7-2E4CF352D2F6}"/>
-              </a:ext>
-            </a:extLst>
-          </p:cNvPr>
-          <p:cNvSpPr>
-            <a:spLocks noGrp="1"/>
-          </p:cNvSpPr>
-          <p:nvPr>
-            <p:ph type="title"/>
-          </p:nvPr>
-        </p:nvSpPr>
-        <p:spPr/>
-        <p:txBody>
-          <a:bodyPr/>
-          <a:lstStyle/>
-          <a:p>
-            <a:pPr algn="ctr"/>
-            <a:r>
-              <a:rPr lang="en-GB" dirty="0"/>
-              <a:t>Summary</a:t>
-            </a:r>
-          </a:p>
-        </p:txBody>
-      </p:sp>
-      <p:sp>
-        <p:nvSpPr>
-          <p:cNvPr id="3" name="Content Placeholder 2">
-            <a:extLst>
-              <a:ext uri="{FF2B5EF4-FFF2-40B4-BE49-F238E27FC236}">
-                <a16:creationId xmlns:a16="http://schemas.microsoft.com/office/drawing/2014/main" id="{4C2EBF2C-5F75-491C-960D-019ABF55093C}"/>
-              </a:ext>
-            </a:extLst>
-          </p:cNvPr>
-          <p:cNvSpPr>
-            <a:spLocks noGrp="1"/>
-          </p:cNvSpPr>
-          <p:nvPr>
-            <p:ph idx="1"/>
-          </p:nvPr>
-        </p:nvSpPr>
-        <p:spPr/>
-        <p:txBody>
-          <a:bodyPr/>
-          <a:lstStyle/>
-          <a:p>
-            <a:r>
-              <a:rPr lang="en-US" altLang="en-US" dirty="0"/>
-              <a:t>Market demand</a:t>
-            </a:r>
-          </a:p>
-          <a:p>
-            <a:pPr lvl="1"/>
-            <a:r>
-              <a:rPr lang="en-US" altLang="en-US" dirty="0"/>
-              <a:t>Horizontal sum of individual demand</a:t>
-            </a:r>
-          </a:p>
-          <a:p>
-            <a:r>
-              <a:rPr lang="en-US" altLang="en-US" dirty="0"/>
-              <a:t>Elasticity of Demand</a:t>
-            </a:r>
-          </a:p>
-          <a:p>
-            <a:pPr lvl="1"/>
-            <a:r>
-              <a:rPr lang="en-US" altLang="en-US" dirty="0"/>
-              <a:t>Measures the relationship between price and quantity demanded of a good</a:t>
-            </a:r>
-          </a:p>
-          <a:p>
-            <a:r>
-              <a:rPr lang="en-US" altLang="en-US" dirty="0"/>
-              <a:t>Consumer Surplus</a:t>
-            </a:r>
-          </a:p>
-          <a:p>
-            <a:pPr lvl="1"/>
-            <a:r>
-              <a:rPr lang="en-US" altLang="en-US"/>
-              <a:t>Measures the aggregate benefits to consumers from buying goods</a:t>
-            </a:r>
-          </a:p>
-          <a:p>
-            <a:pPr marL="0" indent="0">
-              <a:buNone/>
-            </a:pPr>
-            <a:endParaRPr lang="en-GB"/>
-          </a:p>
-        </p:txBody>
-      </p:sp>
-    </p:spTree>
-    <p:extLst>
-      <p:ext uri="{BB962C8B-B14F-4D97-AF65-F5344CB8AC3E}">
-        <p14:creationId xmlns:p14="http://schemas.microsoft.com/office/powerpoint/2010/main" val="181074470"/>
-      </p:ext>
-    </p:extLst>
-  </p:cSld>
-  <p:clrMapOvr>
-    <a:masterClrMapping/>
-  </p:clrMapOvr>
-</p:sld>
-</file>
-
-<file path=ppt/slides/slide47.xml><?xml version="1.0" encoding="utf-8"?>
-<p:sld xmlns:a="http://schemas.openxmlformats.org/drawingml/2006/main" xmlns:r="http://schemas.openxmlformats.org/officeDocument/2006/relationships" xmlns:p="http://schemas.openxmlformats.org/presentationml/2006/main">
-  <p:cSld>
-    <p:spTree>
-      <p:nvGrpSpPr>
-        <p:cNvPr id="1" name=""/>
-        <p:cNvGrpSpPr/>
-        <p:nvPr/>
-      </p:nvGrpSpPr>
-      <p:grpSpPr>
-        <a:xfrm>
-          <a:off x="0" y="0"/>
-          <a:ext cx="0" cy="0"/>
-          <a:chOff x="0" y="0"/>
-          <a:chExt cx="0" cy="0"/>
-        </a:xfrm>
-      </p:grpSpPr>
-      <p:sp>
-        <p:nvSpPr>
-          <p:cNvPr id="2" name="Title 1">
-            <a:extLst>
-              <a:ext uri="{FF2B5EF4-FFF2-40B4-BE49-F238E27FC236}">
-                <a16:creationId xmlns:a16="http://schemas.microsoft.com/office/drawing/2014/main" id="{82EE1286-BABF-4A15-A594-A17AA86AA17E}"/>
-              </a:ext>
-            </a:extLst>
-          </p:cNvPr>
-          <p:cNvSpPr>
-            <a:spLocks noGrp="1"/>
-          </p:cNvSpPr>
-          <p:nvPr>
-            <p:ph type="title"/>
-          </p:nvPr>
-        </p:nvSpPr>
-        <p:spPr/>
-        <p:txBody>
-          <a:bodyPr/>
-          <a:lstStyle/>
-          <a:p>
-            <a:pPr algn="ctr"/>
-            <a:r>
-              <a:rPr lang="it-IT" dirty="0"/>
-              <a:t>Useful links</a:t>
-            </a:r>
-            <a:endParaRPr lang="en-US" dirty="0"/>
-          </a:p>
-        </p:txBody>
-      </p:sp>
-      <p:sp>
-        <p:nvSpPr>
-          <p:cNvPr id="3" name="Content Placeholder 2">
-            <a:extLst>
-              <a:ext uri="{FF2B5EF4-FFF2-40B4-BE49-F238E27FC236}">
-                <a16:creationId xmlns:a16="http://schemas.microsoft.com/office/drawing/2014/main" id="{231D52F6-E1D7-4D54-A491-B891CD004E0E}"/>
-              </a:ext>
-            </a:extLst>
-          </p:cNvPr>
-          <p:cNvSpPr>
-            <a:spLocks noGrp="1"/>
-          </p:cNvSpPr>
-          <p:nvPr>
-            <p:ph idx="1"/>
-          </p:nvPr>
-        </p:nvSpPr>
-        <p:spPr/>
-        <p:txBody>
-          <a:bodyPr/>
-          <a:lstStyle/>
-          <a:p>
-            <a:r>
-              <a:rPr lang="it-IT" dirty="0"/>
-              <a:t>Relationship Elasticity and Total Expenditure (TE): </a:t>
-            </a:r>
-            <a:r>
-              <a:rPr lang="it-IT" dirty="0">
-                <a:solidFill>
-                  <a:srgbClr val="FFFF00"/>
-                </a:solidFill>
-                <a:hlinkClick r:id="rId2">
-                  <a:extLst>
-                    <a:ext uri="{A12FA001-AC4F-418D-AE19-62706E023703}">
-                      <ahyp:hlinkClr xmlns:ahyp="http://schemas.microsoft.com/office/drawing/2018/hyperlinkcolor" val="tx"/>
-                    </a:ext>
-                  </a:extLst>
-                </a:hlinkClick>
-              </a:rPr>
-              <a:t>https://www.economicsdiscussion.net/relationship/relationship-between-price-elasticity-of-demand-and-total-expenditure-microeconomics/31057</a:t>
-            </a:r>
-            <a:r>
-              <a:rPr lang="it-IT" dirty="0">
-                <a:solidFill>
-                  <a:srgbClr val="FFFF00"/>
-                </a:solidFill>
-              </a:rPr>
-              <a:t> </a:t>
-            </a:r>
-            <a:endParaRPr lang="en-US" dirty="0">
-              <a:solidFill>
-                <a:srgbClr val="FFFF00"/>
-              </a:solidFill>
-            </a:endParaRPr>
-          </a:p>
-        </p:txBody>
-      </p:sp>
-    </p:spTree>
-    <p:extLst>
-      <p:ext uri="{BB962C8B-B14F-4D97-AF65-F5344CB8AC3E}">
-        <p14:creationId xmlns:p14="http://schemas.microsoft.com/office/powerpoint/2010/main" val="2464186640"/>
       </p:ext>
     </p:extLst>
   </p:cSld>
@@ -19361,6 +19853,248 @@
     <p:extLst>
       <p:ext uri="{BB962C8B-B14F-4D97-AF65-F5344CB8AC3E}">
         <p14:creationId xmlns:p14="http://schemas.microsoft.com/office/powerpoint/2010/main" val="2360709121"/>
+      </p:ext>
+    </p:extLst>
+  </p:cSld>
+  <p:clrMapOvr>
+    <a:masterClrMapping/>
+  </p:clrMapOvr>
+</p:sld>
+</file>
+
+<file path=ppt/slides/slide50.xml><?xml version="1.0" encoding="utf-8"?>
+<p:sld xmlns:a="http://schemas.openxmlformats.org/drawingml/2006/main" xmlns:r="http://schemas.openxmlformats.org/officeDocument/2006/relationships" xmlns:p="http://schemas.openxmlformats.org/presentationml/2006/main">
+  <p:cSld>
+    <p:spTree>
+      <p:nvGrpSpPr>
+        <p:cNvPr id="1" name=""/>
+        <p:cNvGrpSpPr/>
+        <p:nvPr/>
+      </p:nvGrpSpPr>
+      <p:grpSpPr>
+        <a:xfrm>
+          <a:off x="0" y="0"/>
+          <a:ext cx="0" cy="0"/>
+          <a:chOff x="0" y="0"/>
+          <a:chExt cx="0" cy="0"/>
+        </a:xfrm>
+      </p:grpSpPr>
+      <p:sp>
+        <p:nvSpPr>
+          <p:cNvPr id="2" name="Title 1">
+            <a:extLst>
+              <a:ext uri="{FF2B5EF4-FFF2-40B4-BE49-F238E27FC236}">
+                <a16:creationId xmlns:a16="http://schemas.microsoft.com/office/drawing/2014/main" id="{AFF2E352-8DE9-4BB7-84A7-2E4CF352D2F6}"/>
+              </a:ext>
+            </a:extLst>
+          </p:cNvPr>
+          <p:cNvSpPr>
+            <a:spLocks noGrp="1"/>
+          </p:cNvSpPr>
+          <p:nvPr>
+            <p:ph type="title"/>
+          </p:nvPr>
+        </p:nvSpPr>
+        <p:spPr/>
+        <p:txBody>
+          <a:bodyPr/>
+          <a:lstStyle/>
+          <a:p>
+            <a:pPr algn="ctr"/>
+            <a:r>
+              <a:rPr lang="en-GB" dirty="0"/>
+              <a:t>Summary</a:t>
+            </a:r>
+          </a:p>
+        </p:txBody>
+      </p:sp>
+      <p:sp>
+        <p:nvSpPr>
+          <p:cNvPr id="3" name="Content Placeholder 2">
+            <a:extLst>
+              <a:ext uri="{FF2B5EF4-FFF2-40B4-BE49-F238E27FC236}">
+                <a16:creationId xmlns:a16="http://schemas.microsoft.com/office/drawing/2014/main" id="{4C2EBF2C-5F75-491C-960D-019ABF55093C}"/>
+              </a:ext>
+            </a:extLst>
+          </p:cNvPr>
+          <p:cNvSpPr>
+            <a:spLocks noGrp="1"/>
+          </p:cNvSpPr>
+          <p:nvPr>
+            <p:ph idx="1"/>
+          </p:nvPr>
+        </p:nvSpPr>
+        <p:spPr/>
+        <p:txBody>
+          <a:bodyPr/>
+          <a:lstStyle/>
+          <a:p>
+            <a:r>
+              <a:rPr lang="en-US" altLang="en-US" dirty="0"/>
+              <a:t>Market demand</a:t>
+            </a:r>
+          </a:p>
+          <a:p>
+            <a:pPr lvl="1"/>
+            <a:r>
+              <a:rPr lang="en-US" altLang="en-US" dirty="0"/>
+              <a:t>Horizontal sum of individual demand</a:t>
+            </a:r>
+          </a:p>
+          <a:p>
+            <a:r>
+              <a:rPr lang="en-US" altLang="en-US" dirty="0"/>
+              <a:t>Elasticity of Demand</a:t>
+            </a:r>
+          </a:p>
+          <a:p>
+            <a:pPr lvl="1"/>
+            <a:r>
+              <a:rPr lang="en-US" altLang="en-US" dirty="0"/>
+              <a:t>Measures the relationship between price and quantity demanded of a good</a:t>
+            </a:r>
+          </a:p>
+          <a:p>
+            <a:r>
+              <a:rPr lang="en-US" altLang="en-US" dirty="0"/>
+              <a:t>Consumer Surplus</a:t>
+            </a:r>
+          </a:p>
+          <a:p>
+            <a:pPr lvl="1"/>
+            <a:r>
+              <a:rPr lang="en-US" altLang="en-US"/>
+              <a:t>Measures the aggregate benefits to consumers from buying goods</a:t>
+            </a:r>
+          </a:p>
+          <a:p>
+            <a:pPr marL="0" indent="0">
+              <a:buNone/>
+            </a:pPr>
+            <a:endParaRPr lang="en-GB"/>
+          </a:p>
+        </p:txBody>
+      </p:sp>
+    </p:spTree>
+    <p:extLst>
+      <p:ext uri="{BB962C8B-B14F-4D97-AF65-F5344CB8AC3E}">
+        <p14:creationId xmlns:p14="http://schemas.microsoft.com/office/powerpoint/2010/main" val="181074470"/>
+      </p:ext>
+    </p:extLst>
+  </p:cSld>
+  <p:clrMapOvr>
+    <a:masterClrMapping/>
+  </p:clrMapOvr>
+</p:sld>
+</file>
+
+<file path=ppt/slides/slide51.xml><?xml version="1.0" encoding="utf-8"?>
+<p:sld xmlns:a="http://schemas.openxmlformats.org/drawingml/2006/main" xmlns:r="http://schemas.openxmlformats.org/officeDocument/2006/relationships" xmlns:p="http://schemas.openxmlformats.org/presentationml/2006/main">
+  <p:cSld>
+    <p:spTree>
+      <p:nvGrpSpPr>
+        <p:cNvPr id="1" name=""/>
+        <p:cNvGrpSpPr/>
+        <p:nvPr/>
+      </p:nvGrpSpPr>
+      <p:grpSpPr>
+        <a:xfrm>
+          <a:off x="0" y="0"/>
+          <a:ext cx="0" cy="0"/>
+          <a:chOff x="0" y="0"/>
+          <a:chExt cx="0" cy="0"/>
+        </a:xfrm>
+      </p:grpSpPr>
+      <p:sp>
+        <p:nvSpPr>
+          <p:cNvPr id="2" name="Title 1">
+            <a:extLst>
+              <a:ext uri="{FF2B5EF4-FFF2-40B4-BE49-F238E27FC236}">
+                <a16:creationId xmlns:a16="http://schemas.microsoft.com/office/drawing/2014/main" id="{82EE1286-BABF-4A15-A594-A17AA86AA17E}"/>
+              </a:ext>
+            </a:extLst>
+          </p:cNvPr>
+          <p:cNvSpPr>
+            <a:spLocks noGrp="1"/>
+          </p:cNvSpPr>
+          <p:nvPr>
+            <p:ph type="title"/>
+          </p:nvPr>
+        </p:nvSpPr>
+        <p:spPr/>
+        <p:txBody>
+          <a:bodyPr/>
+          <a:lstStyle/>
+          <a:p>
+            <a:pPr algn="ctr"/>
+            <a:r>
+              <a:rPr lang="it-IT" dirty="0"/>
+              <a:t>Useful links</a:t>
+            </a:r>
+            <a:endParaRPr lang="en-US" dirty="0"/>
+          </a:p>
+        </p:txBody>
+      </p:sp>
+      <p:sp>
+        <p:nvSpPr>
+          <p:cNvPr id="3" name="Content Placeholder 2">
+            <a:extLst>
+              <a:ext uri="{FF2B5EF4-FFF2-40B4-BE49-F238E27FC236}">
+                <a16:creationId xmlns:a16="http://schemas.microsoft.com/office/drawing/2014/main" id="{231D52F6-E1D7-4D54-A491-B891CD004E0E}"/>
+              </a:ext>
+            </a:extLst>
+          </p:cNvPr>
+          <p:cNvSpPr>
+            <a:spLocks noGrp="1"/>
+          </p:cNvSpPr>
+          <p:nvPr>
+            <p:ph idx="1"/>
+          </p:nvPr>
+        </p:nvSpPr>
+        <p:spPr/>
+        <p:txBody>
+          <a:bodyPr/>
+          <a:lstStyle/>
+          <a:p>
+            <a:r>
+              <a:rPr lang="it-IT" dirty="0"/>
+              <a:t>Relationship Elasticity and Total Expenditure (TE): </a:t>
+            </a:r>
+            <a:r>
+              <a:rPr lang="it-IT" dirty="0">
+                <a:solidFill>
+                  <a:srgbClr val="FFFF00"/>
+                </a:solidFill>
+                <a:hlinkClick r:id="rId2">
+                  <a:extLst>
+                    <a:ext uri="{A12FA001-AC4F-418D-AE19-62706E023703}">
+                      <ahyp:hlinkClr xmlns:ahyp="http://schemas.microsoft.com/office/drawing/2018/hyperlinkcolor" val="tx"/>
+                    </a:ext>
+                  </a:extLst>
+                </a:hlinkClick>
+              </a:rPr>
+              <a:t>https://www.economicsdiscussion.net/relationship/relationship-between-price-elasticity-of-demand-and-total-expenditure-microeconomics/31057</a:t>
+            </a:r>
+            <a:r>
+              <a:rPr lang="it-IT" dirty="0">
+                <a:solidFill>
+                  <a:srgbClr val="FFFF00"/>
+                </a:solidFill>
+              </a:rPr>
+              <a:t> </a:t>
+            </a:r>
+            <a:endParaRPr lang="en-US" dirty="0">
+              <a:solidFill>
+                <a:srgbClr val="FFFF00"/>
+              </a:solidFill>
+            </a:endParaRPr>
+          </a:p>
+        </p:txBody>
+      </p:sp>
+    </p:spTree>
+    <p:extLst>
+      <p:ext uri="{BB962C8B-B14F-4D97-AF65-F5344CB8AC3E}">
+        <p14:creationId xmlns:p14="http://schemas.microsoft.com/office/powerpoint/2010/main" val="2464186640"/>
       </p:ext>
     </p:extLst>
   </p:cSld>
@@ -19782,7 +20516,7 @@
             <a:pPr lvl="1"/>
             <a:r>
               <a:rPr lang="en-US" altLang="en-US" dirty="0"/>
-              <a:t>Tea and milk </a:t>
+              <a:t>Tea and coffee  </a:t>
             </a:r>
           </a:p>
           <a:p>
@@ -21684,6 +22418,21 @@
 </file>
 
 <file path=customXml/item1.xml><?xml version="1.0" encoding="utf-8"?>
+<?mso-contentType ?>
+<FormTemplates xmlns="http://schemas.microsoft.com/sharepoint/v3/contenttype/forms">
+  <Display>DocumentLibraryForm</Display>
+  <Edit>DocumentLibraryForm</Edit>
+  <New>DocumentLibraryForm</New>
+</FormTemplates>
+</file>
+
+<file path=customXml/item2.xml><?xml version="1.0" encoding="utf-8"?>
+<p:properties xmlns:p="http://schemas.microsoft.com/office/2006/metadata/properties" xmlns:xsi="http://www.w3.org/2001/XMLSchema-instance" xmlns:pc="http://schemas.microsoft.com/office/infopath/2007/PartnerControls">
+  <documentManagement/>
+</p:properties>
+</file>
+
+<file path=customXml/item3.xml><?xml version="1.0" encoding="utf-8"?>
 <ct:contentTypeSchema xmlns:ct="http://schemas.microsoft.com/office/2006/metadata/contentType" xmlns:ma="http://schemas.microsoft.com/office/2006/metadata/properties/metaAttributes" ct:_="" ma:_="" ma:contentTypeName="Dokument" ma:contentTypeID="0x010100086B82B2E673BB48BBFD907EF88B1F72" ma:contentTypeVersion="0" ma:contentTypeDescription="Opprett et nytt dokument." ma:contentTypeScope="" ma:versionID="0653049da3c7d6103ba0b9e54f21c3f6">
   <xsd:schema xmlns:xsd="http://www.w3.org/2001/XMLSchema" xmlns:xs="http://www.w3.org/2001/XMLSchema" xmlns:p="http://schemas.microsoft.com/office/2006/metadata/properties" targetNamespace="http://schemas.microsoft.com/office/2006/metadata/properties" ma:root="true" ma:fieldsID="3e2500873ed525c1cf306a41cba81ed5">
     <xsd:element name="properties">
@@ -21797,22 +22546,30 @@
 </ct:contentTypeSchema>
 </file>
 
-<file path=customXml/item2.xml><?xml version="1.0" encoding="utf-8"?>
-<?mso-contentType ?>
-<FormTemplates xmlns="http://schemas.microsoft.com/sharepoint/v3/contenttype/forms">
-  <Display>DocumentLibraryForm</Display>
-  <Edit>DocumentLibraryForm</Edit>
-  <New>DocumentLibraryForm</New>
-</FormTemplates>
+<file path=customXml/itemProps1.xml><?xml version="1.0" encoding="utf-8"?>
+<ds:datastoreItem xmlns:ds="http://schemas.openxmlformats.org/officeDocument/2006/customXml" ds:itemID="{27479CE2-CFF2-495B-B6E0-2F66375CDBBB}">
+  <ds:schemaRefs>
+    <ds:schemaRef ds:uri="http://schemas.microsoft.com/sharepoint/v3/contenttype/forms"/>
+  </ds:schemaRefs>
+</ds:datastoreItem>
 </file>
 
-<file path=customXml/item3.xml><?xml version="1.0" encoding="utf-8"?>
-<p:properties xmlns:p="http://schemas.microsoft.com/office/2006/metadata/properties" xmlns:xsi="http://www.w3.org/2001/XMLSchema-instance" xmlns:pc="http://schemas.microsoft.com/office/infopath/2007/PartnerControls">
-  <documentManagement/>
-</p:properties>
+<file path=customXml/itemProps2.xml><?xml version="1.0" encoding="utf-8"?>
+<ds:datastoreItem xmlns:ds="http://schemas.openxmlformats.org/officeDocument/2006/customXml" ds:itemID="{3CAC7484-FE6E-40E6-83CA-83D55D847BA8}">
+  <ds:schemaRefs>
+    <ds:schemaRef ds:uri="http://schemas.microsoft.com/office/2006/documentManagement/types"/>
+    <ds:schemaRef ds:uri="http://schemas.microsoft.com/office/2006/metadata/properties"/>
+    <ds:schemaRef ds:uri="http://schemas.microsoft.com/office/infopath/2007/PartnerControls"/>
+    <ds:schemaRef ds:uri="http://schemas.openxmlformats.org/package/2006/metadata/core-properties"/>
+    <ds:schemaRef ds:uri="http://purl.org/dc/dcmitype/"/>
+    <ds:schemaRef ds:uri="http://purl.org/dc/terms/"/>
+    <ds:schemaRef ds:uri="http://www.w3.org/XML/1998/namespace"/>
+    <ds:schemaRef ds:uri="http://purl.org/dc/elements/1.1/"/>
+  </ds:schemaRefs>
+</ds:datastoreItem>
 </file>
 
-<file path=customXml/itemProps1.xml><?xml version="1.0" encoding="utf-8"?>
+<file path=customXml/itemProps3.xml><?xml version="1.0" encoding="utf-8"?>
 <ds:datastoreItem xmlns:ds="http://schemas.openxmlformats.org/officeDocument/2006/customXml" ds:itemID="{C299F0B8-F1FA-4547-8345-D1C345C8ADDE}">
   <ds:schemaRefs>
     <ds:schemaRef ds:uri="http://schemas.microsoft.com/office/2006/metadata/contentType"/>
@@ -21826,27 +22583,4 @@
     <ds:schemaRef ds:uri="http://schemas.microsoft.com/office/infopath/2007/PartnerControls"/>
   </ds:schemaRefs>
 </ds:datastoreItem>
-</file>
-
-<file path=customXml/itemProps2.xml><?xml version="1.0" encoding="utf-8"?>
-<ds:datastoreItem xmlns:ds="http://schemas.openxmlformats.org/officeDocument/2006/customXml" ds:itemID="{27479CE2-CFF2-495B-B6E0-2F66375CDBBB}">
-  <ds:schemaRefs>
-    <ds:schemaRef ds:uri="http://schemas.microsoft.com/sharepoint/v3/contenttype/forms"/>
-  </ds:schemaRefs>
-</ds:datastoreItem>
-</file>
-
-<file path=customXml/itemProps3.xml><?xml version="1.0" encoding="utf-8"?>
-<ds:datastoreItem xmlns:ds="http://schemas.openxmlformats.org/officeDocument/2006/customXml" ds:itemID="{3CAC7484-FE6E-40E6-83CA-83D55D847BA8}">
-  <ds:schemaRefs>
-    <ds:schemaRef ds:uri="http://schemas.microsoft.com/office/2006/documentManagement/types"/>
-    <ds:schemaRef ds:uri="http://schemas.microsoft.com/office/2006/metadata/properties"/>
-    <ds:schemaRef ds:uri="http://schemas.microsoft.com/office/infopath/2007/PartnerControls"/>
-    <ds:schemaRef ds:uri="http://schemas.openxmlformats.org/package/2006/metadata/core-properties"/>
-    <ds:schemaRef ds:uri="http://purl.org/dc/dcmitype/"/>
-    <ds:schemaRef ds:uri="http://purl.org/dc/terms/"/>
-    <ds:schemaRef ds:uri="http://www.w3.org/XML/1998/namespace"/>
-    <ds:schemaRef ds:uri="http://purl.org/dc/elements/1.1/"/>
-  </ds:schemaRefs>
-</ds:datastoreItem>
 </file>
--- a/lectures/L3.pptx
+++ b/lectures/L3.pptx
@@ -2911,7 +2911,7 @@
           <a:p>
             <a:fld id="{2A8A781A-1859-4C85-BF75-12C8100C455E}" type="datetimeFigureOut">
               <a:rPr lang="nb-NO" smtClean="0"/>
-              <a:t>31.07.2026</a:t>
+              <a:t>31.08.2026</a:t>
             </a:fld>
             <a:endParaRPr lang="nb-NO" dirty="0"/>
           </a:p>
@@ -3088,7 +3088,7 @@
           <a:p>
             <a:fld id="{8B442447-825E-F44A-AE66-BBD0FC2F1FF6}" type="datetimeFigureOut">
               <a:rPr lang="nb-NO" smtClean="0"/>
-              <a:t>31.07.2026</a:t>
+              <a:t>31.08.2026</a:t>
             </a:fld>
             <a:endParaRPr lang="nb-NO" dirty="0"/>
           </a:p>
@@ -11624,14 +11624,11 @@
                 <a:pPr/>
                 <a14:m>
                   <m:oMathPara xmlns:m="http://schemas.openxmlformats.org/officeDocument/2006/math">
-                    <m:oMathParaPr>
-                      <m:jc m:val="centerGroup"/>
-                    </m:oMathParaPr>
-                    <m:oMath xmlns:m="http://schemas.openxmlformats.org/officeDocument/2006/math">
+                    <m:oMath>
                       <m:sSup>
                         <m:sSupPr>
                           <m:ctrlPr>
-                            <a:rPr lang="en-US" i="1" smtClean="0">
+                            <a:rPr lang="en-US" b="0" i="1" smtClean="0">
                               <a:latin typeface="Cambria Math" panose="02040503050406030204" pitchFamily="18" charset="0"/>
                             </a:rPr>
                           </m:ctrlPr>
@@ -11739,10 +11736,7 @@
                 <a:pPr/>
                 <a14:m>
                   <m:oMathPara xmlns:m="http://schemas.openxmlformats.org/officeDocument/2006/math">
-                    <m:oMathParaPr>
-                      <m:jc m:val="centerGroup"/>
-                    </m:oMathParaPr>
-                    <m:oMath xmlns:m="http://schemas.openxmlformats.org/officeDocument/2006/math">
+                    <m:oMath>
                       <m:r>
                         <a:rPr lang="en-US" b="0" i="1" smtClean="0">
                           <a:latin typeface="Cambria Math" panose="02040503050406030204" pitchFamily="18" charset="0"/>
@@ -11835,10 +11829,7 @@
                 <a:pPr/>
                 <a14:m>
                   <m:oMathPara xmlns:m="http://schemas.openxmlformats.org/officeDocument/2006/math">
-                    <m:oMathParaPr>
-                      <m:jc m:val="centerGroup"/>
-                    </m:oMathParaPr>
-                    <m:oMath xmlns:m="http://schemas.openxmlformats.org/officeDocument/2006/math">
+                    <m:oMath>
                       <m:r>
                         <a:rPr lang="en-US" b="0" i="1" smtClean="0">
                           <a:latin typeface="Cambria Math" panose="02040503050406030204" pitchFamily="18" charset="0"/>
@@ -12023,14 +12014,11 @@
                 <a:pPr/>
                 <a14:m>
                   <m:oMathPara xmlns:m="http://schemas.openxmlformats.org/officeDocument/2006/math">
-                    <m:oMathParaPr>
-                      <m:jc m:val="centerGroup"/>
-                    </m:oMathParaPr>
-                    <m:oMath xmlns:m="http://schemas.openxmlformats.org/officeDocument/2006/math">
+                    <m:oMath>
                       <m:sSup>
                         <m:sSupPr>
                           <m:ctrlPr>
-                            <a:rPr lang="en-US" i="1" smtClean="0">
+                            <a:rPr lang="en-US" b="0" i="1" smtClean="0">
                               <a:solidFill>
                                 <a:schemeClr val="accent6"/>
                               </a:solidFill>
@@ -12838,14 +12826,11 @@
                 <a:pPr/>
                 <a14:m>
                   <m:oMathPara xmlns:m="http://schemas.openxmlformats.org/officeDocument/2006/math">
-                    <m:oMathParaPr>
-                      <m:jc m:val="centerGroup"/>
-                    </m:oMathParaPr>
-                    <m:oMath xmlns:m="http://schemas.openxmlformats.org/officeDocument/2006/math">
+                    <m:oMath>
                       <m:sSup>
                         <m:sSupPr>
                           <m:ctrlPr>
-                            <a:rPr lang="en-US" i="1" smtClean="0">
+                            <a:rPr lang="en-US" b="0" i="1" smtClean="0">
                               <a:latin typeface="Cambria Math" panose="02040503050406030204" pitchFamily="18" charset="0"/>
                             </a:rPr>
                           </m:ctrlPr>
@@ -12953,10 +12938,7 @@
                 <a:pPr/>
                 <a14:m>
                   <m:oMathPara xmlns:m="http://schemas.openxmlformats.org/officeDocument/2006/math">
-                    <m:oMathParaPr>
-                      <m:jc m:val="centerGroup"/>
-                    </m:oMathParaPr>
-                    <m:oMath xmlns:m="http://schemas.openxmlformats.org/officeDocument/2006/math">
+                    <m:oMath>
                       <m:r>
                         <a:rPr lang="en-US" b="0" i="1" smtClean="0">
                           <a:latin typeface="Cambria Math" panose="02040503050406030204" pitchFamily="18" charset="0"/>
@@ -13049,10 +13031,7 @@
                 <a:pPr/>
                 <a14:m>
                   <m:oMathPara xmlns:m="http://schemas.openxmlformats.org/officeDocument/2006/math">
-                    <m:oMathParaPr>
-                      <m:jc m:val="centerGroup"/>
-                    </m:oMathParaPr>
-                    <m:oMath xmlns:m="http://schemas.openxmlformats.org/officeDocument/2006/math">
+                    <m:oMath>
                       <m:r>
                         <a:rPr lang="en-US" b="0" i="1" smtClean="0">
                           <a:latin typeface="Cambria Math" panose="02040503050406030204" pitchFamily="18" charset="0"/>
@@ -13237,14 +13216,11 @@
                 <a:pPr/>
                 <a14:m>
                   <m:oMathPara xmlns:m="http://schemas.openxmlformats.org/officeDocument/2006/math">
-                    <m:oMathParaPr>
-                      <m:jc m:val="centerGroup"/>
-                    </m:oMathParaPr>
-                    <m:oMath xmlns:m="http://schemas.openxmlformats.org/officeDocument/2006/math">
+                    <m:oMath>
                       <m:sSup>
                         <m:sSupPr>
                           <m:ctrlPr>
-                            <a:rPr lang="en-US" i="1" smtClean="0">
+                            <a:rPr lang="en-US" b="0" i="1" smtClean="0">
                               <a:solidFill>
                                 <a:schemeClr val="accent6"/>
                               </a:solidFill>
@@ -15401,10 +15377,7 @@
                 </a:pPr>
                 <a14:m>
                   <m:oMathPara xmlns:m="http://schemas.openxmlformats.org/officeDocument/2006/math">
-                    <m:oMathParaPr>
-                      <m:jc m:val="centerGroup"/>
-                    </m:oMathParaPr>
-                    <m:oMath xmlns:m="http://schemas.openxmlformats.org/officeDocument/2006/math">
+                    <m:oMath>
                       <m:sSubSup>
                         <m:sSubSupPr>
                           <m:ctrlPr>
@@ -15722,10 +15695,7 @@
                 </a:pPr>
                 <a14:m>
                   <m:oMathPara xmlns:m="http://schemas.openxmlformats.org/officeDocument/2006/math">
-                    <m:oMathParaPr>
-                      <m:jc m:val="centerGroup"/>
-                    </m:oMathParaPr>
-                    <m:oMath xmlns:m="http://schemas.openxmlformats.org/officeDocument/2006/math">
+                    <m:oMath>
                       <m:sSubSup>
                         <m:sSubSupPr>
                           <m:ctrlPr>
@@ -16169,14 +16139,11 @@
                 </a:pPr>
                 <a14:m>
                   <m:oMathPara xmlns:m="http://schemas.openxmlformats.org/officeDocument/2006/math">
-                    <m:oMathParaPr>
-                      <m:jc m:val="centerGroup"/>
-                    </m:oMathParaPr>
-                    <m:oMath xmlns:m="http://schemas.openxmlformats.org/officeDocument/2006/math">
+                    <m:oMath>
                       <m:sSub>
                         <m:sSubPr>
                           <m:ctrlPr>
-                            <a:rPr kumimoji="0" lang="en-GB" sz="2400" b="0" i="1" u="none" strike="noStrike" kern="1200" cap="none" spc="0" normalizeH="0" baseline="0" noProof="0" smtClean="0">
+                            <a:rPr kumimoji="0" lang="en-GB" sz="2400" b="0" i="1" u="none" strike="noStrike" kern="1200" cap="none" spc="0" normalizeH="0" baseline="0" noProof="0">
                               <a:ln>
                                 <a:noFill/>
                               </a:ln>
@@ -16382,14 +16349,11 @@
                 </a:pPr>
                 <a14:m>
                   <m:oMathPara xmlns:m="http://schemas.openxmlformats.org/officeDocument/2006/math">
-                    <m:oMathParaPr>
-                      <m:jc m:val="centerGroup"/>
-                    </m:oMathParaPr>
-                    <m:oMath xmlns:m="http://schemas.openxmlformats.org/officeDocument/2006/math">
+                    <m:oMath>
                       <m:sSub>
                         <m:sSubPr>
                           <m:ctrlPr>
-                            <a:rPr kumimoji="0" lang="en-GB" sz="2400" b="0" i="1" u="none" strike="noStrike" kern="1200" cap="none" spc="0" normalizeH="0" baseline="0" noProof="0" smtClean="0">
+                            <a:rPr kumimoji="0" lang="en-GB" sz="2400" b="0" i="1" u="none" strike="noStrike" kern="1200" cap="none" spc="0" normalizeH="0" baseline="0" noProof="0">
                               <a:ln>
                                 <a:noFill/>
                               </a:ln>
@@ -18036,8 +18000,17 @@
             </a:r>
             <a:r>
               <a:rPr lang="en-US" altLang="en-US" sz="1400" b="0" dirty="0">
+                <a:solidFill>
+                  <a:srgbClr val="FFFF00"/>
+                </a:solidFill>
                 <a:cs typeface="Times New Roman" panose="02020603050405020304" pitchFamily="18" charset="0"/>
-                <a:hlinkClick r:id="rId2"/>
+                <a:hlinkClick r:id="rId2">
+                  <a:extLst>
+                    <a:ext uri="{A12FA001-AC4F-418D-AE19-62706E023703}">
+                      <ahyp:hlinkClr xmlns:ahyp="http://schemas.microsoft.com/office/drawing/2018/hyperlinkcolor" val="tx"/>
+                    </a:ext>
+                  </a:extLst>
+                </a:hlinkClick>
               </a:rPr>
               <a:t>U.S. coffee prices are surging at a record pace,” TheStreet, H. Remy, based on Bloomberg/BLS data, March 18, 2026</a:t>
             </a:r>
@@ -18282,7 +18255,9 @@
         </p:nvSpPr>
         <p:spPr/>
         <p:txBody>
-          <a:bodyPr/>
+          <a:bodyPr>
+            <a:normAutofit lnSpcReduction="10000"/>
+          </a:bodyPr>
           <a:lstStyle/>
           <a:p>
             <a:pPr eaLnBrk="1" hangingPunct="1">
@@ -18309,7 +18284,16 @@
             </a:r>
             <a:r>
               <a:rPr lang="en-US" altLang="en-US" sz="1800" dirty="0">
-                <a:hlinkClick r:id="rId2"/>
+                <a:solidFill>
+                  <a:srgbClr val="FFFF00"/>
+                </a:solidFill>
+                <a:hlinkClick r:id="rId2">
+                  <a:extLst>
+                    <a:ext uri="{A12FA001-AC4F-418D-AE19-62706E023703}">
+                      <ahyp:hlinkClr xmlns:ahyp="http://schemas.microsoft.com/office/drawing/2018/hyperlinkcolor" val="tx"/>
+                    </a:ext>
+                  </a:extLst>
+                </a:hlinkClick>
               </a:rPr>
               <a:t>Penn Wharton Budget Model, May 11, 2026 </a:t>
             </a:r>
@@ -18339,9 +18323,33 @@
             </a:r>
             <a:r>
               <a:rPr lang="en-US" altLang="en-US" sz="1800" dirty="0">
-                <a:hlinkClick r:id="rId3"/>
+                <a:solidFill>
+                  <a:srgbClr val="0563C1"/>
+                </a:solidFill>
+                <a:hlinkClick r:id="rId3">
+                  <a:extLst>
+                    <a:ext uri="{A12FA001-AC4F-418D-AE19-62706E023703}">
+                      <ahyp:hlinkClr xmlns:ahyp="http://schemas.microsoft.com/office/drawing/2018/hyperlinkcolor" val="tx"/>
+                    </a:ext>
+                  </a:extLst>
+                </a:hlinkClick>
               </a:rPr>
-              <a:t>-Rabobank, reported via FreshFruitPortal &amp; Citrus Industry Magazine, June 2026</a:t>
+              <a:t>-</a:t>
+            </a:r>
+            <a:r>
+              <a:rPr lang="en-US" altLang="en-US" sz="1800" dirty="0">
+                <a:solidFill>
+                  <a:srgbClr val="FFFF00"/>
+                </a:solidFill>
+                <a:hlinkClick r:id="rId3">
+                  <a:extLst>
+                    <a:ext uri="{A12FA001-AC4F-418D-AE19-62706E023703}">
+                      <ahyp:hlinkClr xmlns:ahyp="http://schemas.microsoft.com/office/drawing/2018/hyperlinkcolor" val="tx"/>
+                    </a:ext>
+                  </a:extLst>
+                </a:hlinkClick>
+              </a:rPr>
+              <a:t>Rabobank, reported via FreshFruitPortal &amp; Citrus Industry Magazine, June 2026</a:t>
             </a:r>
           </a:p>
           <a:p>
@@ -22418,21 +22426,6 @@
 </file>
 
 <file path=customXml/item1.xml><?xml version="1.0" encoding="utf-8"?>
-<?mso-contentType ?>
-<FormTemplates xmlns="http://schemas.microsoft.com/sharepoint/v3/contenttype/forms">
-  <Display>DocumentLibraryForm</Display>
-  <Edit>DocumentLibraryForm</Edit>
-  <New>DocumentLibraryForm</New>
-</FormTemplates>
-</file>
-
-<file path=customXml/item2.xml><?xml version="1.0" encoding="utf-8"?>
-<p:properties xmlns:p="http://schemas.microsoft.com/office/2006/metadata/properties" xmlns:xsi="http://www.w3.org/2001/XMLSchema-instance" xmlns:pc="http://schemas.microsoft.com/office/infopath/2007/PartnerControls">
-  <documentManagement/>
-</p:properties>
-</file>
-
-<file path=customXml/item3.xml><?xml version="1.0" encoding="utf-8"?>
 <ct:contentTypeSchema xmlns:ct="http://schemas.microsoft.com/office/2006/metadata/contentType" xmlns:ma="http://schemas.microsoft.com/office/2006/metadata/properties/metaAttributes" ct:_="" ma:_="" ma:contentTypeName="Dokument" ma:contentTypeID="0x010100086B82B2E673BB48BBFD907EF88B1F72" ma:contentTypeVersion="0" ma:contentTypeDescription="Opprett et nytt dokument." ma:contentTypeScope="" ma:versionID="0653049da3c7d6103ba0b9e54f21c3f6">
   <xsd:schema xmlns:xsd="http://www.w3.org/2001/XMLSchema" xmlns:xs="http://www.w3.org/2001/XMLSchema" xmlns:p="http://schemas.microsoft.com/office/2006/metadata/properties" targetNamespace="http://schemas.microsoft.com/office/2006/metadata/properties" ma:root="true" ma:fieldsID="3e2500873ed525c1cf306a41cba81ed5">
     <xsd:element name="properties">
@@ -22546,30 +22539,22 @@
 </ct:contentTypeSchema>
 </file>
 
-<file path=customXml/itemProps1.xml><?xml version="1.0" encoding="utf-8"?>
-<ds:datastoreItem xmlns:ds="http://schemas.openxmlformats.org/officeDocument/2006/customXml" ds:itemID="{27479CE2-CFF2-495B-B6E0-2F66375CDBBB}">
-  <ds:schemaRefs>
-    <ds:schemaRef ds:uri="http://schemas.microsoft.com/sharepoint/v3/contenttype/forms"/>
-  </ds:schemaRefs>
-</ds:datastoreItem>
+<file path=customXml/item2.xml><?xml version="1.0" encoding="utf-8"?>
+<?mso-contentType ?>
+<FormTemplates xmlns="http://schemas.microsoft.com/sharepoint/v3/contenttype/forms">
+  <Display>DocumentLibraryForm</Display>
+  <Edit>DocumentLibraryForm</Edit>
+  <New>DocumentLibraryForm</New>
+</FormTemplates>
 </file>
 
-<file path=customXml/itemProps2.xml><?xml version="1.0" encoding="utf-8"?>
-<ds:datastoreItem xmlns:ds="http://schemas.openxmlformats.org/officeDocument/2006/customXml" ds:itemID="{3CAC7484-FE6E-40E6-83CA-83D55D847BA8}">
-  <ds:schemaRefs>
-    <ds:schemaRef ds:uri="http://schemas.microsoft.com/office/2006/documentManagement/types"/>
-    <ds:schemaRef ds:uri="http://schemas.microsoft.com/office/2006/metadata/properties"/>
-    <ds:schemaRef ds:uri="http://schemas.microsoft.com/office/infopath/2007/PartnerControls"/>
-    <ds:schemaRef ds:uri="http://schemas.openxmlformats.org/package/2006/metadata/core-properties"/>
-    <ds:schemaRef ds:uri="http://purl.org/dc/dcmitype/"/>
-    <ds:schemaRef ds:uri="http://purl.org/dc/terms/"/>
-    <ds:schemaRef ds:uri="http://www.w3.org/XML/1998/namespace"/>
-    <ds:schemaRef ds:uri="http://purl.org/dc/elements/1.1/"/>
-  </ds:schemaRefs>
-</ds:datastoreItem>
+<file path=customXml/item3.xml><?xml version="1.0" encoding="utf-8"?>
+<p:properties xmlns:p="http://schemas.microsoft.com/office/2006/metadata/properties" xmlns:xsi="http://www.w3.org/2001/XMLSchema-instance" xmlns:pc="http://schemas.microsoft.com/office/infopath/2007/PartnerControls">
+  <documentManagement/>
+</p:properties>
 </file>
 
-<file path=customXml/itemProps3.xml><?xml version="1.0" encoding="utf-8"?>
+<file path=customXml/itemProps1.xml><?xml version="1.0" encoding="utf-8"?>
 <ds:datastoreItem xmlns:ds="http://schemas.openxmlformats.org/officeDocument/2006/customXml" ds:itemID="{C299F0B8-F1FA-4547-8345-D1C345C8ADDE}">
   <ds:schemaRefs>
     <ds:schemaRef ds:uri="http://schemas.microsoft.com/office/2006/metadata/contentType"/>
@@ -22583,4 +22568,27 @@
     <ds:schemaRef ds:uri="http://schemas.microsoft.com/office/infopath/2007/PartnerControls"/>
   </ds:schemaRefs>
 </ds:datastoreItem>
+</file>
+
+<file path=customXml/itemProps2.xml><?xml version="1.0" encoding="utf-8"?>
+<ds:datastoreItem xmlns:ds="http://schemas.openxmlformats.org/officeDocument/2006/customXml" ds:itemID="{27479CE2-CFF2-495B-B6E0-2F66375CDBBB}">
+  <ds:schemaRefs>
+    <ds:schemaRef ds:uri="http://schemas.microsoft.com/sharepoint/v3/contenttype/forms"/>
+  </ds:schemaRefs>
+</ds:datastoreItem>
+</file>
+
+<file path=customXml/itemProps3.xml><?xml version="1.0" encoding="utf-8"?>
+<ds:datastoreItem xmlns:ds="http://schemas.openxmlformats.org/officeDocument/2006/customXml" ds:itemID="{3CAC7484-FE6E-40E6-83CA-83D55D847BA8}">
+  <ds:schemaRefs>
+    <ds:schemaRef ds:uri="http://schemas.microsoft.com/office/2006/documentManagement/types"/>
+    <ds:schemaRef ds:uri="http://schemas.microsoft.com/office/2006/metadata/properties"/>
+    <ds:schemaRef ds:uri="http://schemas.microsoft.com/office/infopath/2007/PartnerControls"/>
+    <ds:schemaRef ds:uri="http://schemas.openxmlformats.org/package/2006/metadata/core-properties"/>
+    <ds:schemaRef ds:uri="http://purl.org/dc/dcmitype/"/>
+    <ds:schemaRef ds:uri="http://purl.org/dc/terms/"/>
+    <ds:schemaRef ds:uri="http://www.w3.org/XML/1998/namespace"/>
+    <ds:schemaRef ds:uri="http://purl.org/dc/elements/1.1/"/>
+  </ds:schemaRefs>
+</ds:datastoreItem>
 </file>